--- a/09.望山河读书分享/《望山河》读书分享（30分钟版）.pptx
+++ b/09.望山河读书分享/《望山河》读书分享（30分钟版）.pptx
@@ -34,6 +34,7 @@
     <p:sldId id="282" r:id="rId34"/>
     <p:sldId id="283" r:id="rId35"/>
     <p:sldId id="284" r:id="rId36"/>
+    <p:sldId id="285" r:id="rId37"/>
   </p:sldIdLst>
   <p:sldSz cx="12191695" cy="6858000" type="screen4x3"/>
   <p:notesSz cx="6858000" cy="9144000"/>
@@ -2556,6 +2557,81 @@
                 <a:cs typeface="Microsoft YaHei"/>
               </a:rPr>
               <a:t>三十七篇内容很丰富，今天时间有限，我选读的是前三篇：李舫写北大红楼，张军锋写上海石库门，梁衡写南湖红船。</a:t>
+            </a:r>
+          </a:p>
+        </p:txBody>
+      </p:sp>
+      <p:sp>
+        <p:nvSpPr>
+          <p:cNvPr id="4" name="Slide Number Placeholder 3"/>
+          <p:cNvSpPr>
+            <a:spLocks noGrp="1"/>
+          </p:cNvSpPr>
+          <p:nvPr>
+            <p:ph type="sldNum" idx="5" sz="quarter"/>
+          </p:nvPr>
+        </p:nvSpPr>
+        <p:spPr/>
+      </p:sp>
+    </p:spTree>
+  </p:cSld>
+  <p:clrMapOvr>
+    <a:masterClrMapping/>
+  </p:clrMapOvr>
+</p:notes>
+</file>
+
+<file path=ppt/notesSlides/notesSlide30.xml><?xml version="1.0" encoding="utf-8"?>
+<p:notes xmlns:a="http://schemas.openxmlformats.org/drawingml/2006/main" xmlns:p="http://schemas.openxmlformats.org/presentationml/2006/main" xmlns:r="http://schemas.openxmlformats.org/officeDocument/2006/relationships">
+  <p:cSld>
+    <p:spTree>
+      <p:nvGrpSpPr>
+        <p:cNvPr id="1" name=""/>
+        <p:cNvGrpSpPr/>
+        <p:nvPr/>
+      </p:nvGrpSpPr>
+      <p:grpSpPr>
+        <a:xfrm>
+          <a:off x="0" y="0"/>
+          <a:ext cx="0" cy="0"/>
+          <a:chOff x="0" y="0"/>
+          <a:chExt cx="0" cy="0"/>
+        </a:xfrm>
+      </p:grpSpPr>
+      <p:sp>
+        <p:nvSpPr>
+          <p:cNvPr id="2" name="Slide Image Placeholder 1"/>
+          <p:cNvSpPr>
+            <a:spLocks noGrp="1"/>
+          </p:cNvSpPr>
+          <p:nvPr>
+            <p:ph type="sldImg" idx="2"/>
+          </p:nvPr>
+        </p:nvSpPr>
+        <p:spPr/>
+      </p:sp>
+      <p:sp>
+        <p:nvSpPr>
+          <p:cNvPr id="3" name="Notes Placeholder 2"/>
+          <p:cNvSpPr>
+            <a:spLocks noGrp="1"/>
+          </p:cNvSpPr>
+          <p:nvPr>
+            <p:ph type="body" idx="3" sz="quarter"/>
+          </p:nvPr>
+        </p:nvSpPr>
+        <p:spPr/>
+        <p:txBody>
+          <a:bodyPr/>
+          <a:lstStyle/>
+          <a:p>
+            <a:r>
+              <a:rPr sz="2000">
+                <a:latin typeface="Microsoft YaHei"/>
+                <a:ea typeface="Microsoft YaHei"/>
+                <a:cs typeface="Microsoft YaHei"/>
+              </a:rPr>
+              <a:t>（本页不讲，仅作图片署名）</a:t>
             </a:r>
           </a:p>
         </p:txBody>
@@ -6097,8 +6173,8 @@
         </p:nvSpPr>
         <p:spPr>
           <a:xfrm>
-            <a:off x="0" y="411480"/>
-            <a:ext cx="12191695" cy="36576"/>
+            <a:off x="0" y="0"/>
+            <a:ext cx="12191695" cy="3886200"/>
           </a:xfrm>
           <a:prstGeom prst="rect">
             <a:avLst/>
@@ -6133,106 +6209,40 @@
           </a:p>
         </p:txBody>
       </p:sp>
-      <p:sp>
-        <p:nvSpPr>
-          <p:cNvPr id="3" name="Rectangle 2"/>
-          <p:cNvSpPr/>
-          <p:nvPr/>
-        </p:nvSpPr>
-        <p:spPr>
-          <a:xfrm>
-            <a:off x="0" y="6409944"/>
-            <a:ext cx="12191695" cy="36576"/>
-          </a:xfrm>
-          <a:prstGeom prst="rect">
-            <a:avLst/>
-          </a:prstGeom>
-          <a:solidFill>
-            <a:srgbClr val="C8A15A"/>
-          </a:solidFill>
-          <a:ln>
-            <a:noFill/>
-          </a:ln>
-          <a:effectLst/>
-        </p:spPr>
-        <p:style>
-          <a:lnRef idx="1">
-            <a:schemeClr val="accent1"/>
-          </a:lnRef>
-          <a:fillRef idx="3">
-            <a:schemeClr val="accent1"/>
-          </a:fillRef>
-          <a:effectRef idx="2">
-            <a:schemeClr val="accent1"/>
-          </a:effectRef>
-          <a:fontRef idx="minor">
-            <a:schemeClr val="lt1"/>
-          </a:fontRef>
-        </p:style>
-        <p:txBody>
-          <a:bodyPr rtlCol="0" anchor="ctr"/>
-          <a:lstStyle/>
-          <a:p>
-            <a:pPr algn="ctr"/>
-          </a:p>
-        </p:txBody>
-      </p:sp>
-      <p:sp>
-        <p:nvSpPr>
-          <p:cNvPr id="4" name="Rounded Rectangle 3"/>
-          <p:cNvSpPr/>
-          <p:nvPr/>
-        </p:nvSpPr>
-        <p:spPr>
-          <a:xfrm>
-            <a:off x="4937760" y="868680"/>
-            <a:ext cx="2313432" cy="566928"/>
-          </a:xfrm>
-          <a:prstGeom prst="roundRect">
-            <a:avLst>
-              <a:gd name="adj" fmla="val 12000"/>
-            </a:avLst>
-          </a:prstGeom>
-          <a:noFill/>
-          <a:ln w="19050">
-            <a:solidFill>
-              <a:srgbClr val="C8A15A"/>
-            </a:solidFill>
-          </a:ln>
-          <a:effectLst/>
-        </p:spPr>
-        <p:style>
-          <a:lnRef idx="1">
-            <a:schemeClr val="accent1"/>
-          </a:lnRef>
-          <a:fillRef idx="3">
-            <a:schemeClr val="accent1"/>
-          </a:fillRef>
-          <a:effectRef idx="2">
-            <a:schemeClr val="accent1"/>
-          </a:effectRef>
-          <a:fontRef idx="minor">
-            <a:schemeClr val="lt1"/>
-          </a:fontRef>
-        </p:style>
-        <p:txBody>
-          <a:bodyPr rtlCol="0" anchor="ctr"/>
-          <a:lstStyle/>
-          <a:p>
-            <a:pPr algn="ctr"/>
-          </a:p>
-        </p:txBody>
-      </p:sp>
-      <p:sp>
-        <p:nvSpPr>
-          <p:cNvPr id="5" name="TextBox 4"/>
+      <p:pic>
+        <p:nvPicPr>
+          <p:cNvPr id="3" name="Picture 2" descr="image.jpg"/>
+          <p:cNvPicPr>
+            <a:picLocks noChangeAspect="1"/>
+          </p:cNvPicPr>
+          <p:nvPr/>
+        </p:nvPicPr>
+        <p:blipFill>
+          <a:blip r:embed="rId3"/>
+          <a:stretch>
+            <a:fillRect/>
+          </a:stretch>
+        </p:blipFill>
+        <p:spPr>
+          <a:xfrm>
+            <a:off x="0" y="0"/>
+            <a:ext cx="4053535" cy="3840480"/>
+          </a:xfrm>
+          <a:prstGeom prst="rect">
+            <a:avLst/>
+          </a:prstGeom>
+        </p:spPr>
+      </p:pic>
+      <p:sp>
+        <p:nvSpPr>
+          <p:cNvPr id="4" name="TextBox 3"/>
           <p:cNvSpPr txBox="1"/>
           <p:nvPr/>
         </p:nvSpPr>
         <p:spPr>
           <a:xfrm>
-            <a:off x="4937760" y="868680"/>
-            <a:ext cx="2313432" cy="566928"/>
+            <a:off x="0" y="3154680"/>
+            <a:ext cx="4053535" cy="548640"/>
           </a:xfrm>
           <a:prstGeom prst="rect">
             <a:avLst/>
@@ -6251,20 +6261,44 @@
               </a:lnSpc>
             </a:pPr>
             <a:r>
-              <a:rPr sz="2400" b="0">
-                <a:solidFill>
-                  <a:srgbClr val="C8A15A"/>
-                </a:solidFill>
-                <a:latin typeface="Microsoft YaHei"/>
-                <a:ea typeface="Microsoft YaHei"/>
-                <a:cs typeface="Microsoft YaHei"/>
-              </a:rPr>
-              <a:t>读书分享会</a:t>
-            </a:r>
-            <a:endParaRPr sz="2400"/>
-          </a:p>
-        </p:txBody>
-      </p:sp>
+              <a:rPr sz="2200" b="1">
+                <a:solidFill>
+                  <a:srgbClr val="FFFFFF"/>
+                </a:solidFill>
+                <a:latin typeface="Microsoft YaHei"/>
+                <a:ea typeface="Microsoft YaHei"/>
+                <a:cs typeface="Microsoft YaHei"/>
+              </a:rPr>
+              <a:t>一栋楼 · 北大红楼</a:t>
+            </a:r>
+            <a:endParaRPr sz="2200"/>
+          </a:p>
+        </p:txBody>
+      </p:sp>
+      <p:pic>
+        <p:nvPicPr>
+          <p:cNvPr id="5" name="Picture 4" descr="image.jpg"/>
+          <p:cNvPicPr>
+            <a:picLocks noChangeAspect="1"/>
+          </p:cNvPicPr>
+          <p:nvPr/>
+        </p:nvPicPr>
+        <p:blipFill>
+          <a:blip r:embed="rId4"/>
+          <a:stretch>
+            <a:fillRect/>
+          </a:stretch>
+        </p:blipFill>
+        <p:spPr>
+          <a:xfrm>
+            <a:off x="4069080" y="0"/>
+            <a:ext cx="4053535" cy="3840480"/>
+          </a:xfrm>
+          <a:prstGeom prst="rect">
+            <a:avLst/>
+          </a:prstGeom>
+        </p:spPr>
+      </p:pic>
       <p:sp>
         <p:nvSpPr>
           <p:cNvPr id="6" name="TextBox 5"/>
@@ -6273,8 +6307,8 @@
         </p:nvSpPr>
         <p:spPr>
           <a:xfrm>
-            <a:off x="457200" y="1691640"/>
-            <a:ext cx="11277295" cy="1097280"/>
+            <a:off x="4069080" y="3154680"/>
+            <a:ext cx="4053535" cy="548640"/>
           </a:xfrm>
           <a:prstGeom prst="rect">
             <a:avLst/>
@@ -6293,7 +6327,7 @@
               </a:lnSpc>
             </a:pPr>
             <a:r>
-              <a:rPr sz="6000" b="1">
+              <a:rPr sz="2200" b="1">
                 <a:solidFill>
                   <a:srgbClr val="FFFFFF"/>
                 </a:solidFill>
@@ -6301,22 +6335,130 @@
                 <a:ea typeface="Microsoft YaHei"/>
                 <a:cs typeface="Microsoft YaHei"/>
               </a:rPr>
+              <a:t>一幢房 · 上海石库门</a:t>
+            </a:r>
+            <a:endParaRPr sz="2200"/>
+          </a:p>
+        </p:txBody>
+      </p:sp>
+      <p:pic>
+        <p:nvPicPr>
+          <p:cNvPr id="7" name="Picture 6" descr="image.jpg"/>
+          <p:cNvPicPr>
+            <a:picLocks noChangeAspect="1"/>
+          </p:cNvPicPr>
+          <p:nvPr/>
+        </p:nvPicPr>
+        <p:blipFill>
+          <a:blip r:embed="rId5"/>
+          <a:stretch>
+            <a:fillRect/>
+          </a:stretch>
+        </p:blipFill>
+        <p:spPr>
+          <a:xfrm>
+            <a:off x="8138160" y="0"/>
+            <a:ext cx="4053535" cy="3840480"/>
+          </a:xfrm>
+          <a:prstGeom prst="rect">
+            <a:avLst/>
+          </a:prstGeom>
+        </p:spPr>
+      </p:pic>
+      <p:sp>
+        <p:nvSpPr>
+          <p:cNvPr id="8" name="TextBox 7"/>
+          <p:cNvSpPr txBox="1"/>
+          <p:nvPr/>
+        </p:nvSpPr>
+        <p:spPr>
+          <a:xfrm>
+            <a:off x="8138160" y="3154680"/>
+            <a:ext cx="4053535" cy="548640"/>
+          </a:xfrm>
+          <a:prstGeom prst="rect">
+            <a:avLst/>
+          </a:prstGeom>
+          <a:noFill/>
+        </p:spPr>
+        <p:txBody>
+          <a:bodyPr wrap="square" anchor="ctr" lIns="36576" rIns="36576" tIns="36576" bIns="36576">
+            <a:noAutofit/>
+          </a:bodyPr>
+          <a:lstStyle/>
+          <a:p>
+            <a:pPr algn="ctr">
+              <a:lnSpc>
+                <a:spcPct val="120000"/>
+              </a:lnSpc>
+            </a:pPr>
+            <a:r>
+              <a:rPr sz="2200" b="1">
+                <a:solidFill>
+                  <a:srgbClr val="FFFFFF"/>
+                </a:solidFill>
+                <a:latin typeface="Microsoft YaHei"/>
+                <a:ea typeface="Microsoft YaHei"/>
+                <a:cs typeface="Microsoft YaHei"/>
+              </a:rPr>
+              <a:t>一只船 · 南湖红船</a:t>
+            </a:r>
+            <a:endParaRPr sz="2200"/>
+          </a:p>
+        </p:txBody>
+      </p:sp>
+      <p:sp>
+        <p:nvSpPr>
+          <p:cNvPr id="9" name="TextBox 8"/>
+          <p:cNvSpPr txBox="1"/>
+          <p:nvPr/>
+        </p:nvSpPr>
+        <p:spPr>
+          <a:xfrm>
+            <a:off x="457200" y="4023360"/>
+            <a:ext cx="11277295" cy="960120"/>
+          </a:xfrm>
+          <a:prstGeom prst="rect">
+            <a:avLst/>
+          </a:prstGeom>
+          <a:noFill/>
+        </p:spPr>
+        <p:txBody>
+          <a:bodyPr wrap="square" anchor="ctr" lIns="36576" rIns="36576" tIns="36576" bIns="36576">
+            <a:noAutofit/>
+          </a:bodyPr>
+          <a:lstStyle/>
+          <a:p>
+            <a:pPr algn="ctr">
+              <a:lnSpc>
+                <a:spcPct val="120000"/>
+              </a:lnSpc>
+            </a:pPr>
+            <a:r>
+              <a:rPr sz="5600" b="1">
+                <a:solidFill>
+                  <a:srgbClr val="FFFFFF"/>
+                </a:solidFill>
+                <a:latin typeface="Microsoft YaHei"/>
+                <a:ea typeface="Microsoft YaHei"/>
+                <a:cs typeface="Microsoft YaHei"/>
+              </a:rPr>
               <a:t>一栋楼、一幢房、一只船</a:t>
             </a:r>
-            <a:endParaRPr sz="6000"/>
-          </a:p>
-        </p:txBody>
-      </p:sp>
-      <p:sp>
-        <p:nvSpPr>
-          <p:cNvPr id="7" name="TextBox 6"/>
+            <a:endParaRPr sz="5600"/>
+          </a:p>
+        </p:txBody>
+      </p:sp>
+      <p:sp>
+        <p:nvSpPr>
+          <p:cNvPr id="10" name="TextBox 9"/>
           <p:cNvSpPr txBox="1"/>
           <p:nvPr/>
         </p:nvSpPr>
         <p:spPr>
           <a:xfrm>
-            <a:off x="457200" y="2834640"/>
-            <a:ext cx="11277295" cy="640080"/>
+            <a:off x="457200" y="4983480"/>
+            <a:ext cx="11277295" cy="594360"/>
           </a:xfrm>
           <a:prstGeom prst="rect">
             <a:avLst/>
@@ -6335,7 +6477,7 @@
               </a:lnSpc>
             </a:pPr>
             <a:r>
-              <a:rPr sz="3200" b="0">
+              <a:rPr sz="3000" b="0">
                 <a:solidFill>
                   <a:srgbClr val="C8A15A"/>
                 </a:solidFill>
@@ -6345,415 +6487,19 @@
               </a:rPr>
               <a:t>——《望山河》前三篇读书分享</a:t>
             </a:r>
-            <a:endParaRPr sz="3200"/>
-          </a:p>
-        </p:txBody>
-      </p:sp>
-      <p:sp>
-        <p:nvSpPr>
-          <p:cNvPr id="8" name="Rectangle 7"/>
-          <p:cNvSpPr/>
-          <p:nvPr/>
-        </p:nvSpPr>
-        <p:spPr>
-          <a:xfrm>
-            <a:off x="4498848" y="3794760"/>
-            <a:ext cx="914400" cy="914400"/>
-          </a:xfrm>
-          <a:prstGeom prst="rect">
-            <a:avLst/>
-          </a:prstGeom>
-          <a:solidFill>
-            <a:srgbClr val="7A1212"/>
-          </a:solidFill>
-          <a:ln w="31750">
-            <a:solidFill>
-              <a:srgbClr val="C8A15A"/>
-            </a:solidFill>
-          </a:ln>
-          <a:effectLst/>
-        </p:spPr>
-        <p:style>
-          <a:lnRef idx="1">
-            <a:schemeClr val="accent1"/>
-          </a:lnRef>
-          <a:fillRef idx="3">
-            <a:schemeClr val="accent1"/>
-          </a:fillRef>
-          <a:effectRef idx="2">
-            <a:schemeClr val="accent1"/>
-          </a:effectRef>
-          <a:fontRef idx="minor">
-            <a:schemeClr val="lt1"/>
-          </a:fontRef>
-        </p:style>
-        <p:txBody>
-          <a:bodyPr rtlCol="0" anchor="ctr"/>
-          <a:lstStyle/>
-          <a:p>
-            <a:pPr algn="ctr"/>
-          </a:p>
-        </p:txBody>
-      </p:sp>
-      <p:sp>
-        <p:nvSpPr>
-          <p:cNvPr id="9" name="Rectangle 8"/>
-          <p:cNvSpPr/>
-          <p:nvPr/>
-        </p:nvSpPr>
-        <p:spPr>
-          <a:xfrm>
-            <a:off x="4572000" y="3867912"/>
-            <a:ext cx="768096" cy="768096"/>
-          </a:xfrm>
-          <a:prstGeom prst="rect">
-            <a:avLst/>
-          </a:prstGeom>
-          <a:noFill/>
-          <a:ln w="12700">
-            <a:solidFill>
-              <a:srgbClr val="C8A15A"/>
-            </a:solidFill>
-          </a:ln>
-          <a:effectLst/>
-        </p:spPr>
-        <p:style>
-          <a:lnRef idx="1">
-            <a:schemeClr val="accent1"/>
-          </a:lnRef>
-          <a:fillRef idx="3">
-            <a:schemeClr val="accent1"/>
-          </a:fillRef>
-          <a:effectRef idx="2">
-            <a:schemeClr val="accent1"/>
-          </a:effectRef>
-          <a:fontRef idx="minor">
-            <a:schemeClr val="lt1"/>
-          </a:fontRef>
-        </p:style>
-        <p:txBody>
-          <a:bodyPr rtlCol="0" anchor="ctr"/>
-          <a:lstStyle/>
-          <a:p>
-            <a:pPr algn="ctr"/>
-          </a:p>
-        </p:txBody>
-      </p:sp>
-      <p:sp>
-        <p:nvSpPr>
-          <p:cNvPr id="10" name="TextBox 9"/>
+            <a:endParaRPr sz="3000"/>
+          </a:p>
+        </p:txBody>
+      </p:sp>
+      <p:sp>
+        <p:nvSpPr>
+          <p:cNvPr id="11" name="TextBox 10"/>
           <p:cNvSpPr txBox="1"/>
           <p:nvPr/>
         </p:nvSpPr>
         <p:spPr>
           <a:xfrm>
-            <a:off x="4498848" y="3794760"/>
-            <a:ext cx="914400" cy="914400"/>
-          </a:xfrm>
-          <a:prstGeom prst="rect">
-            <a:avLst/>
-          </a:prstGeom>
-          <a:noFill/>
-        </p:spPr>
-        <p:txBody>
-          <a:bodyPr wrap="square" anchor="ctr" lIns="36576" rIns="36576" tIns="36576" bIns="36576">
-            <a:noAutofit/>
-          </a:bodyPr>
-          <a:lstStyle/>
-          <a:p>
-            <a:pPr algn="ctr">
-              <a:lnSpc>
-                <a:spcPct val="100000"/>
-              </a:lnSpc>
-            </a:pPr>
-            <a:r>
-              <a:rPr sz="3900" b="1">
-                <a:solidFill>
-                  <a:srgbClr val="C8A15A"/>
-                </a:solidFill>
-                <a:latin typeface="KaiTi"/>
-                <a:ea typeface="KaiTi"/>
-                <a:cs typeface="KaiTi"/>
-              </a:rPr>
-              <a:t>楼</a:t>
-            </a:r>
-            <a:endParaRPr sz="3900"/>
-          </a:p>
-        </p:txBody>
-      </p:sp>
-      <p:sp>
-        <p:nvSpPr>
-          <p:cNvPr id="11" name="Rectangle 10"/>
-          <p:cNvSpPr/>
-          <p:nvPr/>
-        </p:nvSpPr>
-        <p:spPr>
-          <a:xfrm>
-            <a:off x="5705856" y="3794760"/>
-            <a:ext cx="914400" cy="914400"/>
-          </a:xfrm>
-          <a:prstGeom prst="rect">
-            <a:avLst/>
-          </a:prstGeom>
-          <a:solidFill>
-            <a:srgbClr val="7A1212"/>
-          </a:solidFill>
-          <a:ln w="31750">
-            <a:solidFill>
-              <a:srgbClr val="C8A15A"/>
-            </a:solidFill>
-          </a:ln>
-          <a:effectLst/>
-        </p:spPr>
-        <p:style>
-          <a:lnRef idx="1">
-            <a:schemeClr val="accent1"/>
-          </a:lnRef>
-          <a:fillRef idx="3">
-            <a:schemeClr val="accent1"/>
-          </a:fillRef>
-          <a:effectRef idx="2">
-            <a:schemeClr val="accent1"/>
-          </a:effectRef>
-          <a:fontRef idx="minor">
-            <a:schemeClr val="lt1"/>
-          </a:fontRef>
-        </p:style>
-        <p:txBody>
-          <a:bodyPr rtlCol="0" anchor="ctr"/>
-          <a:lstStyle/>
-          <a:p>
-            <a:pPr algn="ctr"/>
-          </a:p>
-        </p:txBody>
-      </p:sp>
-      <p:sp>
-        <p:nvSpPr>
-          <p:cNvPr id="12" name="Rectangle 11"/>
-          <p:cNvSpPr/>
-          <p:nvPr/>
-        </p:nvSpPr>
-        <p:spPr>
-          <a:xfrm>
-            <a:off x="5779008" y="3867912"/>
-            <a:ext cx="768096" cy="768096"/>
-          </a:xfrm>
-          <a:prstGeom prst="rect">
-            <a:avLst/>
-          </a:prstGeom>
-          <a:noFill/>
-          <a:ln w="12700">
-            <a:solidFill>
-              <a:srgbClr val="C8A15A"/>
-            </a:solidFill>
-          </a:ln>
-          <a:effectLst/>
-        </p:spPr>
-        <p:style>
-          <a:lnRef idx="1">
-            <a:schemeClr val="accent1"/>
-          </a:lnRef>
-          <a:fillRef idx="3">
-            <a:schemeClr val="accent1"/>
-          </a:fillRef>
-          <a:effectRef idx="2">
-            <a:schemeClr val="accent1"/>
-          </a:effectRef>
-          <a:fontRef idx="minor">
-            <a:schemeClr val="lt1"/>
-          </a:fontRef>
-        </p:style>
-        <p:txBody>
-          <a:bodyPr rtlCol="0" anchor="ctr"/>
-          <a:lstStyle/>
-          <a:p>
-            <a:pPr algn="ctr"/>
-          </a:p>
-        </p:txBody>
-      </p:sp>
-      <p:sp>
-        <p:nvSpPr>
-          <p:cNvPr id="13" name="TextBox 12"/>
-          <p:cNvSpPr txBox="1"/>
-          <p:nvPr/>
-        </p:nvSpPr>
-        <p:spPr>
-          <a:xfrm>
-            <a:off x="5705856" y="3794760"/>
-            <a:ext cx="914400" cy="914400"/>
-          </a:xfrm>
-          <a:prstGeom prst="rect">
-            <a:avLst/>
-          </a:prstGeom>
-          <a:noFill/>
-        </p:spPr>
-        <p:txBody>
-          <a:bodyPr wrap="square" anchor="ctr" lIns="36576" rIns="36576" tIns="36576" bIns="36576">
-            <a:noAutofit/>
-          </a:bodyPr>
-          <a:lstStyle/>
-          <a:p>
-            <a:pPr algn="ctr">
-              <a:lnSpc>
-                <a:spcPct val="100000"/>
-              </a:lnSpc>
-            </a:pPr>
-            <a:r>
-              <a:rPr sz="3900" b="1">
-                <a:solidFill>
-                  <a:srgbClr val="C8A15A"/>
-                </a:solidFill>
-                <a:latin typeface="KaiTi"/>
-                <a:ea typeface="KaiTi"/>
-                <a:cs typeface="KaiTi"/>
-              </a:rPr>
-              <a:t>房</a:t>
-            </a:r>
-            <a:endParaRPr sz="3900"/>
-          </a:p>
-        </p:txBody>
-      </p:sp>
-      <p:sp>
-        <p:nvSpPr>
-          <p:cNvPr id="14" name="Rectangle 13"/>
-          <p:cNvSpPr/>
-          <p:nvPr/>
-        </p:nvSpPr>
-        <p:spPr>
-          <a:xfrm>
-            <a:off x="6912864" y="3794760"/>
-            <a:ext cx="914400" cy="914400"/>
-          </a:xfrm>
-          <a:prstGeom prst="rect">
-            <a:avLst/>
-          </a:prstGeom>
-          <a:solidFill>
-            <a:srgbClr val="7A1212"/>
-          </a:solidFill>
-          <a:ln w="31750">
-            <a:solidFill>
-              <a:srgbClr val="C8A15A"/>
-            </a:solidFill>
-          </a:ln>
-          <a:effectLst/>
-        </p:spPr>
-        <p:style>
-          <a:lnRef idx="1">
-            <a:schemeClr val="accent1"/>
-          </a:lnRef>
-          <a:fillRef idx="3">
-            <a:schemeClr val="accent1"/>
-          </a:fillRef>
-          <a:effectRef idx="2">
-            <a:schemeClr val="accent1"/>
-          </a:effectRef>
-          <a:fontRef idx="minor">
-            <a:schemeClr val="lt1"/>
-          </a:fontRef>
-        </p:style>
-        <p:txBody>
-          <a:bodyPr rtlCol="0" anchor="ctr"/>
-          <a:lstStyle/>
-          <a:p>
-            <a:pPr algn="ctr"/>
-          </a:p>
-        </p:txBody>
-      </p:sp>
-      <p:sp>
-        <p:nvSpPr>
-          <p:cNvPr id="15" name="Rectangle 14"/>
-          <p:cNvSpPr/>
-          <p:nvPr/>
-        </p:nvSpPr>
-        <p:spPr>
-          <a:xfrm>
-            <a:off x="6986016" y="3867912"/>
-            <a:ext cx="768096" cy="768096"/>
-          </a:xfrm>
-          <a:prstGeom prst="rect">
-            <a:avLst/>
-          </a:prstGeom>
-          <a:noFill/>
-          <a:ln w="12700">
-            <a:solidFill>
-              <a:srgbClr val="C8A15A"/>
-            </a:solidFill>
-          </a:ln>
-          <a:effectLst/>
-        </p:spPr>
-        <p:style>
-          <a:lnRef idx="1">
-            <a:schemeClr val="accent1"/>
-          </a:lnRef>
-          <a:fillRef idx="3">
-            <a:schemeClr val="accent1"/>
-          </a:fillRef>
-          <a:effectRef idx="2">
-            <a:schemeClr val="accent1"/>
-          </a:effectRef>
-          <a:fontRef idx="minor">
-            <a:schemeClr val="lt1"/>
-          </a:fontRef>
-        </p:style>
-        <p:txBody>
-          <a:bodyPr rtlCol="0" anchor="ctr"/>
-          <a:lstStyle/>
-          <a:p>
-            <a:pPr algn="ctr"/>
-          </a:p>
-        </p:txBody>
-      </p:sp>
-      <p:sp>
-        <p:nvSpPr>
-          <p:cNvPr id="16" name="TextBox 15"/>
-          <p:cNvSpPr txBox="1"/>
-          <p:nvPr/>
-        </p:nvSpPr>
-        <p:spPr>
-          <a:xfrm>
-            <a:off x="6912864" y="3794760"/>
-            <a:ext cx="914400" cy="914400"/>
-          </a:xfrm>
-          <a:prstGeom prst="rect">
-            <a:avLst/>
-          </a:prstGeom>
-          <a:noFill/>
-        </p:spPr>
-        <p:txBody>
-          <a:bodyPr wrap="square" anchor="ctr" lIns="36576" rIns="36576" tIns="36576" bIns="36576">
-            <a:noAutofit/>
-          </a:bodyPr>
-          <a:lstStyle/>
-          <a:p>
-            <a:pPr algn="ctr">
-              <a:lnSpc>
-                <a:spcPct val="100000"/>
-              </a:lnSpc>
-            </a:pPr>
-            <a:r>
-              <a:rPr sz="3900" b="1">
-                <a:solidFill>
-                  <a:srgbClr val="C8A15A"/>
-                </a:solidFill>
-                <a:latin typeface="KaiTi"/>
-                <a:ea typeface="KaiTi"/>
-                <a:cs typeface="KaiTi"/>
-              </a:rPr>
-              <a:t>船</a:t>
-            </a:r>
-            <a:endParaRPr sz="3900"/>
-          </a:p>
-        </p:txBody>
-      </p:sp>
-      <p:sp>
-        <p:nvSpPr>
-          <p:cNvPr id="17" name="TextBox 16"/>
-          <p:cNvSpPr txBox="1"/>
-          <p:nvPr/>
-        </p:nvSpPr>
-        <p:spPr>
-          <a:xfrm>
-            <a:off x="457200" y="5120640"/>
+            <a:off x="457200" y="5715000"/>
             <a:ext cx="11277295" cy="548640"/>
           </a:xfrm>
           <a:prstGeom prst="rect">
@@ -6910,7 +6656,7 @@
         <p:spPr>
           <a:xfrm>
             <a:off x="822960" y="384048"/>
-            <a:ext cx="8229600" cy="411480"/>
+            <a:ext cx="10607040" cy="411480"/>
           </a:xfrm>
           <a:prstGeom prst="rect">
             <a:avLst/>
@@ -7449,7 +7195,7 @@
         <p:spPr>
           <a:xfrm>
             <a:off x="822960" y="384048"/>
-            <a:ext cx="8229600" cy="411480"/>
+            <a:ext cx="10607040" cy="411480"/>
           </a:xfrm>
           <a:prstGeom prst="rect">
             <a:avLst/>
@@ -8238,7 +7984,7 @@
         <p:spPr>
           <a:xfrm>
             <a:off x="822960" y="384048"/>
-            <a:ext cx="8229600" cy="411480"/>
+            <a:ext cx="10607040" cy="411480"/>
           </a:xfrm>
           <a:prstGeom prst="rect">
             <a:avLst/>
@@ -9236,16 +8982,40 @@
         <p:nvPr/>
       </p:nvGrpSpPr>
       <p:grpSpPr/>
-      <p:sp>
-        <p:nvSpPr>
-          <p:cNvPr id="2" name="Rectangle 1"/>
+      <p:pic>
+        <p:nvPicPr>
+          <p:cNvPr id="2" name="Picture 1" descr="image.jpg"/>
+          <p:cNvPicPr>
+            <a:picLocks noChangeAspect="1"/>
+          </p:cNvPicPr>
+          <p:nvPr/>
+        </p:nvPicPr>
+        <p:blipFill>
+          <a:blip r:embed="rId3"/>
+          <a:stretch>
+            <a:fillRect/>
+          </a:stretch>
+        </p:blipFill>
+        <p:spPr>
+          <a:xfrm>
+            <a:off x="0" y="0"/>
+            <a:ext cx="6217920" cy="6858000"/>
+          </a:xfrm>
+          <a:prstGeom prst="rect">
+            <a:avLst/>
+          </a:prstGeom>
+        </p:spPr>
+      </p:pic>
+      <p:sp>
+        <p:nvSpPr>
+          <p:cNvPr id="3" name="Rectangle 2"/>
           <p:cNvSpPr/>
           <p:nvPr/>
         </p:nvSpPr>
         <p:spPr>
           <a:xfrm>
-            <a:off x="0" y="411480"/>
-            <a:ext cx="12191695" cy="36576"/>
+            <a:off x="5943600" y="411480"/>
+            <a:ext cx="6248095" cy="36576"/>
           </a:xfrm>
           <a:prstGeom prst="rect">
             <a:avLst/>
@@ -9282,14 +9052,14 @@
       </p:sp>
       <p:sp>
         <p:nvSpPr>
-          <p:cNvPr id="3" name="Rectangle 2"/>
+          <p:cNvPr id="4" name="Rectangle 3"/>
           <p:cNvSpPr/>
           <p:nvPr/>
         </p:nvSpPr>
         <p:spPr>
           <a:xfrm>
-            <a:off x="0" y="6409944"/>
-            <a:ext cx="12191695" cy="36576"/>
+            <a:off x="5943600" y="6409944"/>
+            <a:ext cx="6248095" cy="36576"/>
           </a:xfrm>
           <a:prstGeom prst="rect">
             <a:avLst/>
@@ -9326,14 +9096,14 @@
       </p:sp>
       <p:sp>
         <p:nvSpPr>
-          <p:cNvPr id="4" name="Rectangle 3"/>
+          <p:cNvPr id="5" name="Rectangle 4"/>
           <p:cNvSpPr/>
           <p:nvPr/>
         </p:nvSpPr>
         <p:spPr>
           <a:xfrm>
-            <a:off x="1554480" y="1737360"/>
-            <a:ext cx="3108960" cy="3108960"/>
+            <a:off x="6400800" y="914400"/>
+            <a:ext cx="914400" cy="914400"/>
           </a:xfrm>
           <a:prstGeom prst="rect">
             <a:avLst/>
@@ -9372,14 +9142,14 @@
       </p:sp>
       <p:sp>
         <p:nvSpPr>
-          <p:cNvPr id="5" name="Rectangle 4"/>
+          <p:cNvPr id="6" name="Rectangle 5"/>
           <p:cNvSpPr/>
           <p:nvPr/>
         </p:nvSpPr>
         <p:spPr>
           <a:xfrm>
-            <a:off x="1803196" y="1986076"/>
-            <a:ext cx="2611526" cy="2611526"/>
+            <a:off x="6473952" y="987552"/>
+            <a:ext cx="768096" cy="768096"/>
           </a:xfrm>
           <a:prstGeom prst="rect">
             <a:avLst/>
@@ -9416,14 +9186,14 @@
       </p:sp>
       <p:sp>
         <p:nvSpPr>
-          <p:cNvPr id="6" name="TextBox 5"/>
+          <p:cNvPr id="7" name="TextBox 6"/>
           <p:cNvSpPr txBox="1"/>
           <p:nvPr/>
         </p:nvSpPr>
         <p:spPr>
           <a:xfrm>
-            <a:off x="1554480" y="1737360"/>
-            <a:ext cx="3108960" cy="3108960"/>
+            <a:off x="6400800" y="914400"/>
+            <a:ext cx="914400" cy="914400"/>
           </a:xfrm>
           <a:prstGeom prst="rect">
             <a:avLst/>
@@ -9442,7 +9212,7 @@
               </a:lnSpc>
             </a:pPr>
             <a:r>
-              <a:rPr sz="13400" b="1">
+              <a:rPr sz="3900" b="1">
                 <a:solidFill>
                   <a:srgbClr val="C8A15A"/>
                 </a:solidFill>
@@ -9452,20 +9222,20 @@
               </a:rPr>
               <a:t>房</a:t>
             </a:r>
-            <a:endParaRPr sz="13400"/>
-          </a:p>
-        </p:txBody>
-      </p:sp>
-      <p:sp>
-        <p:nvSpPr>
-          <p:cNvPr id="7" name="TextBox 6"/>
+            <a:endParaRPr sz="3900"/>
+          </a:p>
+        </p:txBody>
+      </p:sp>
+      <p:sp>
+        <p:nvSpPr>
+          <p:cNvPr id="8" name="TextBox 7"/>
           <p:cNvSpPr txBox="1"/>
           <p:nvPr/>
         </p:nvSpPr>
         <p:spPr>
           <a:xfrm>
-            <a:off x="5394960" y="1783080"/>
-            <a:ext cx="6400800" cy="548640"/>
+            <a:off x="6400800" y="2011680"/>
+            <a:ext cx="5486400" cy="548640"/>
           </a:xfrm>
           <a:prstGeom prst="rect">
             <a:avLst/>
@@ -9500,14 +9270,14 @@
       </p:sp>
       <p:sp>
         <p:nvSpPr>
-          <p:cNvPr id="8" name="TextBox 7"/>
+          <p:cNvPr id="9" name="TextBox 8"/>
           <p:cNvSpPr txBox="1"/>
           <p:nvPr/>
         </p:nvSpPr>
         <p:spPr>
           <a:xfrm>
-            <a:off x="5394960" y="2377440"/>
-            <a:ext cx="6400800" cy="1188720"/>
+            <a:off x="6400800" y="2606040"/>
+            <a:ext cx="5486400" cy="1188720"/>
           </a:xfrm>
           <a:prstGeom prst="rect">
             <a:avLst/>
@@ -9542,14 +9312,14 @@
       </p:sp>
       <p:sp>
         <p:nvSpPr>
-          <p:cNvPr id="9" name="TextBox 8"/>
+          <p:cNvPr id="10" name="TextBox 9"/>
           <p:cNvSpPr txBox="1"/>
           <p:nvPr/>
         </p:nvSpPr>
         <p:spPr>
           <a:xfrm>
-            <a:off x="5394960" y="3657600"/>
-            <a:ext cx="6400800" cy="594360"/>
+            <a:off x="6400800" y="3886200"/>
+            <a:ext cx="5486400" cy="594360"/>
           </a:xfrm>
           <a:prstGeom prst="rect">
             <a:avLst/>
@@ -9584,14 +9354,14 @@
       </p:sp>
       <p:sp>
         <p:nvSpPr>
-          <p:cNvPr id="10" name="TextBox 9"/>
+          <p:cNvPr id="11" name="TextBox 10"/>
           <p:cNvSpPr txBox="1"/>
           <p:nvPr/>
         </p:nvSpPr>
         <p:spPr>
           <a:xfrm>
-            <a:off x="5394960" y="4343400"/>
-            <a:ext cx="6400800" cy="502920"/>
+            <a:off x="6400800" y="4572000"/>
+            <a:ext cx="5486400" cy="502920"/>
           </a:xfrm>
           <a:prstGeom prst="rect">
             <a:avLst/>
@@ -9626,7 +9396,7 @@
       </p:sp>
       <p:sp>
         <p:nvSpPr>
-          <p:cNvPr id="11" name="TextBox 10"/>
+          <p:cNvPr id="12" name="TextBox 11"/>
           <p:cNvSpPr txBox="1"/>
           <p:nvPr/>
         </p:nvSpPr>
@@ -9654,7 +9424,7 @@
             <a:r>
               <a:rPr sz="2000" b="0">
                 <a:solidFill>
-                  <a:srgbClr val="C8A15A"/>
+                  <a:srgbClr val="F7E7C6"/>
                 </a:solidFill>
                 <a:latin typeface="Microsoft YaHei"/>
                 <a:ea typeface="Microsoft YaHei"/>
@@ -9789,7 +9559,7 @@
         <p:spPr>
           <a:xfrm>
             <a:off x="822960" y="384048"/>
-            <a:ext cx="8229600" cy="411480"/>
+            <a:ext cx="10607040" cy="411480"/>
           </a:xfrm>
           <a:prstGeom prst="rect">
             <a:avLst/>
@@ -9950,16 +9720,135 @@
           </a:p>
         </p:txBody>
       </p:sp>
-      <p:sp>
-        <p:nvSpPr>
-          <p:cNvPr id="8" name="TextBox 7"/>
+      <p:pic>
+        <p:nvPicPr>
+          <p:cNvPr id="8" name="Picture 7" descr="image.jpg"/>
+          <p:cNvPicPr>
+            <a:picLocks noChangeAspect="1"/>
+          </p:cNvPicPr>
+          <p:nvPr/>
+        </p:nvPicPr>
+        <p:blipFill>
+          <a:blip r:embed="rId3"/>
+          <a:stretch>
+            <a:fillRect/>
+          </a:stretch>
+        </p:blipFill>
+        <p:spPr>
+          <a:xfrm>
+            <a:off x="822960" y="1783080"/>
+            <a:ext cx="5760720" cy="2880360"/>
+          </a:xfrm>
+          <a:prstGeom prst="rect">
+            <a:avLst/>
+          </a:prstGeom>
+          <a:ln w="31750">
+            <a:solidFill>
+              <a:srgbClr val="C8A15A"/>
+            </a:solidFill>
+          </a:ln>
+        </p:spPr>
+      </p:pic>
+      <p:sp>
+        <p:nvSpPr>
+          <p:cNvPr id="9" name="TextBox 8"/>
           <p:cNvSpPr txBox="1"/>
           <p:nvPr/>
         </p:nvSpPr>
         <p:spPr>
           <a:xfrm>
-            <a:off x="822960" y="1783080"/>
-            <a:ext cx="10515600" cy="822960"/>
+            <a:off x="6858000" y="1783080"/>
+            <a:ext cx="4480560" cy="868680"/>
+          </a:xfrm>
+          <a:prstGeom prst="rect">
+            <a:avLst/>
+          </a:prstGeom>
+          <a:noFill/>
+        </p:spPr>
+        <p:txBody>
+          <a:bodyPr wrap="square" anchor="t" lIns="36576" rIns="36576" tIns="36576" bIns="36576">
+            <a:noAutofit/>
+          </a:bodyPr>
+          <a:lstStyle/>
+          <a:p>
+            <a:pPr algn="l">
+              <a:lnSpc>
+                <a:spcPct val="110000"/>
+              </a:lnSpc>
+            </a:pPr>
+            <a:r>
+              <a:rPr sz="2400" b="0">
+                <a:solidFill>
+                  <a:srgbClr val="2B2B2B"/>
+                </a:solidFill>
+                <a:latin typeface="Microsoft YaHei"/>
+                <a:ea typeface="Microsoft YaHei"/>
+                <a:cs typeface="Microsoft YaHei"/>
+              </a:rPr>
+              <a:t>上海法租界望志路106号</a:t>
+            </a:r>
+            <a:endParaRPr sz="2400"/>
+          </a:p>
+          <a:p>
+            <a:pPr algn="l">
+              <a:lnSpc>
+                <a:spcPct val="110000"/>
+              </a:lnSpc>
+            </a:pPr>
+            <a:r>
+              <a:rPr sz="2400" b="0">
+                <a:solidFill>
+                  <a:srgbClr val="2B2B2B"/>
+                </a:solidFill>
+                <a:latin typeface="Microsoft YaHei"/>
+                <a:ea typeface="Microsoft YaHei"/>
+                <a:cs typeface="Microsoft YaHei"/>
+              </a:rPr>
+              <a:t>（今兴业路76号）</a:t>
+            </a:r>
+            <a:endParaRPr sz="2400"/>
+          </a:p>
+        </p:txBody>
+      </p:sp>
+      <p:pic>
+        <p:nvPicPr>
+          <p:cNvPr id="10" name="Picture 9" descr="image.jpg"/>
+          <p:cNvPicPr>
+            <a:picLocks noChangeAspect="1"/>
+          </p:cNvPicPr>
+          <p:nvPr/>
+        </p:nvPicPr>
+        <p:blipFill>
+          <a:blip r:embed="rId4"/>
+          <a:stretch>
+            <a:fillRect/>
+          </a:stretch>
+        </p:blipFill>
+        <p:spPr>
+          <a:xfrm>
+            <a:off x="6858000" y="2788920"/>
+            <a:ext cx="2103120" cy="1463040"/>
+          </a:xfrm>
+          <a:prstGeom prst="rect">
+            <a:avLst/>
+          </a:prstGeom>
+          <a:ln w="31750">
+            <a:solidFill>
+              <a:srgbClr val="C8A15A"/>
+            </a:solidFill>
+          </a:ln>
+        </p:spPr>
+      </p:pic>
+      <p:sp>
+        <p:nvSpPr>
+          <p:cNvPr id="11" name="TextBox 10"/>
+          <p:cNvSpPr txBox="1"/>
+          <p:nvPr/>
+        </p:nvSpPr>
+        <p:spPr>
+          <a:xfrm>
+            <a:off x="9144000" y="2743200"/>
+            <a:ext cx="2194560" cy="1554480"/>
           </a:xfrm>
           <a:prstGeom prst="rect">
             <a:avLst/>
@@ -9974,11 +9863,11 @@
           <a:p>
             <a:pPr algn="l">
               <a:lnSpc>
-                <a:spcPct val="120000"/>
-              </a:lnSpc>
-            </a:pPr>
-            <a:r>
-              <a:rPr sz="2400" b="0">
+                <a:spcPct val="110000"/>
+              </a:lnSpc>
+            </a:pPr>
+            <a:r>
+              <a:rPr sz="2200" b="0">
                 <a:solidFill>
                   <a:srgbClr val="2B2B2B"/>
                 </a:solidFill>
@@ -9986,22 +9875,44 @@
                 <a:ea typeface="Microsoft YaHei"/>
                 <a:cs typeface="Microsoft YaHei"/>
               </a:rPr>
-              <a:t>地点：上海法租界望志路106号（今兴业路76号）的一间客厅</a:t>
-            </a:r>
-            <a:endParaRPr sz="2400"/>
-          </a:p>
-        </p:txBody>
-      </p:sp>
-      <p:sp>
-        <p:nvSpPr>
-          <p:cNvPr id="9" name="Rounded Rectangle 8"/>
+              <a:t>最小的代表才十九岁，</a:t>
+            </a:r>
+            <a:r>
+              <a:rPr sz="2200" b="1">
+                <a:solidFill>
+                  <a:srgbClr val="9E1B1B"/>
+                </a:solidFill>
+                <a:latin typeface="Microsoft YaHei"/>
+                <a:ea typeface="Microsoft YaHei"/>
+                <a:cs typeface="Microsoft YaHei"/>
+              </a:rPr>
+              <a:t>和在座很多同学差不多大</a:t>
+            </a:r>
+            <a:r>
+              <a:rPr sz="2200" b="0">
+                <a:solidFill>
+                  <a:srgbClr val="2B2B2B"/>
+                </a:solidFill>
+                <a:latin typeface="Microsoft YaHei"/>
+                <a:ea typeface="Microsoft YaHei"/>
+                <a:cs typeface="Microsoft YaHei"/>
+              </a:rPr>
+              <a:t>。</a:t>
+            </a:r>
+            <a:endParaRPr sz="2200"/>
+          </a:p>
+        </p:txBody>
+      </p:sp>
+      <p:sp>
+        <p:nvSpPr>
+          <p:cNvPr id="12" name="Rounded Rectangle 11"/>
           <p:cNvSpPr/>
           <p:nvPr/>
         </p:nvSpPr>
         <p:spPr>
           <a:xfrm>
-            <a:off x="822960" y="2788920"/>
-            <a:ext cx="1965960" cy="2103120"/>
+            <a:off x="822960" y="4846320"/>
+            <a:ext cx="1965960" cy="1280160"/>
           </a:xfrm>
           <a:prstGeom prst="roundRect">
             <a:avLst>
@@ -10040,14 +9951,14 @@
       </p:sp>
       <p:sp>
         <p:nvSpPr>
-          <p:cNvPr id="10" name="Rectangle 9"/>
+          <p:cNvPr id="13" name="Rectangle 12"/>
           <p:cNvSpPr/>
           <p:nvPr/>
         </p:nvSpPr>
         <p:spPr>
           <a:xfrm>
-            <a:off x="822960" y="2788920"/>
-            <a:ext cx="1965960" cy="91440"/>
+            <a:off x="822960" y="4846320"/>
+            <a:ext cx="1965960" cy="73152"/>
           </a:xfrm>
           <a:prstGeom prst="rect">
             <a:avLst/>
@@ -10084,14 +9995,14 @@
       </p:sp>
       <p:sp>
         <p:nvSpPr>
-          <p:cNvPr id="11" name="TextBox 10"/>
+          <p:cNvPr id="14" name="TextBox 13"/>
           <p:cNvSpPr txBox="1"/>
           <p:nvPr/>
         </p:nvSpPr>
         <p:spPr>
           <a:xfrm>
-            <a:off x="822960" y="3017520"/>
-            <a:ext cx="1965960" cy="960120"/>
+            <a:off x="822960" y="4937760"/>
+            <a:ext cx="1965960" cy="685800"/>
           </a:xfrm>
           <a:prstGeom prst="rect">
             <a:avLst/>
@@ -10110,7 +10021,7 @@
               </a:lnSpc>
             </a:pPr>
             <a:r>
-              <a:rPr sz="5000" b="1">
+              <a:rPr sz="3600" b="1">
                 <a:solidFill>
                   <a:srgbClr val="9E1B1B"/>
                 </a:solidFill>
@@ -10121,7 +10032,7 @@
               <a:t>13</a:t>
             </a:r>
             <a:r>
-              <a:rPr sz="2400" b="1">
+              <a:rPr sz="2000" b="1">
                 <a:solidFill>
                   <a:srgbClr val="9E1B1B"/>
                 </a:solidFill>
@@ -10131,20 +10042,20 @@
               </a:rPr>
               <a:t>位</a:t>
             </a:r>
-            <a:endParaRPr sz="5000"/>
-          </a:p>
-        </p:txBody>
-      </p:sp>
-      <p:sp>
-        <p:nvSpPr>
-          <p:cNvPr id="12" name="TextBox 11"/>
+            <a:endParaRPr sz="3600"/>
+          </a:p>
+        </p:txBody>
+      </p:sp>
+      <p:sp>
+        <p:nvSpPr>
+          <p:cNvPr id="15" name="TextBox 14"/>
           <p:cNvSpPr txBox="1"/>
           <p:nvPr/>
         </p:nvSpPr>
         <p:spPr>
           <a:xfrm>
-            <a:off x="822960" y="4114800"/>
-            <a:ext cx="1965960" cy="502920"/>
+            <a:off x="822960" y="5596128"/>
+            <a:ext cx="1965960" cy="411480"/>
           </a:xfrm>
           <a:prstGeom prst="rect">
             <a:avLst/>
@@ -10163,7 +10074,7 @@
               </a:lnSpc>
             </a:pPr>
             <a:r>
-              <a:rPr sz="2200" b="0">
+              <a:rPr sz="2000" b="0">
                 <a:solidFill>
                   <a:srgbClr val="2B2B2B"/>
                 </a:solidFill>
@@ -10173,20 +10084,20 @@
               </a:rPr>
               <a:t>出席代表</a:t>
             </a:r>
-            <a:endParaRPr sz="2200"/>
-          </a:p>
-        </p:txBody>
-      </p:sp>
-      <p:sp>
-        <p:nvSpPr>
-          <p:cNvPr id="13" name="Rounded Rectangle 12"/>
+            <a:endParaRPr sz="2000"/>
+          </a:p>
+        </p:txBody>
+      </p:sp>
+      <p:sp>
+        <p:nvSpPr>
+          <p:cNvPr id="16" name="Rounded Rectangle 15"/>
           <p:cNvSpPr/>
           <p:nvPr/>
         </p:nvSpPr>
         <p:spPr>
           <a:xfrm>
-            <a:off x="2971800" y="2788920"/>
-            <a:ext cx="1965960" cy="2103120"/>
+            <a:off x="2971800" y="4846320"/>
+            <a:ext cx="1965960" cy="1280160"/>
           </a:xfrm>
           <a:prstGeom prst="roundRect">
             <a:avLst>
@@ -10225,14 +10136,14 @@
       </p:sp>
       <p:sp>
         <p:nvSpPr>
-          <p:cNvPr id="14" name="Rectangle 13"/>
+          <p:cNvPr id="17" name="Rectangle 16"/>
           <p:cNvSpPr/>
           <p:nvPr/>
         </p:nvSpPr>
         <p:spPr>
           <a:xfrm>
-            <a:off x="2971800" y="2788920"/>
-            <a:ext cx="1965960" cy="91440"/>
+            <a:off x="2971800" y="4846320"/>
+            <a:ext cx="1965960" cy="73152"/>
           </a:xfrm>
           <a:prstGeom prst="rect">
             <a:avLst/>
@@ -10269,14 +10180,14 @@
       </p:sp>
       <p:sp>
         <p:nvSpPr>
-          <p:cNvPr id="15" name="TextBox 14"/>
+          <p:cNvPr id="18" name="TextBox 17"/>
           <p:cNvSpPr txBox="1"/>
           <p:nvPr/>
         </p:nvSpPr>
         <p:spPr>
           <a:xfrm>
-            <a:off x="2971800" y="3017520"/>
-            <a:ext cx="1965960" cy="960120"/>
+            <a:off x="2971800" y="4937760"/>
+            <a:ext cx="1965960" cy="685800"/>
           </a:xfrm>
           <a:prstGeom prst="rect">
             <a:avLst/>
@@ -10295,7 +10206,7 @@
               </a:lnSpc>
             </a:pPr>
             <a:r>
-              <a:rPr sz="5000" b="1">
+              <a:rPr sz="3600" b="1">
                 <a:solidFill>
                   <a:srgbClr val="9E1B1B"/>
                 </a:solidFill>
@@ -10306,7 +10217,7 @@
               <a:t>18</a:t>
             </a:r>
             <a:r>
-              <a:rPr sz="2400" b="1">
+              <a:rPr sz="2000" b="1">
                 <a:solidFill>
                   <a:srgbClr val="9E1B1B"/>
                 </a:solidFill>
@@ -10316,20 +10227,20 @@
               </a:rPr>
               <a:t>㎡</a:t>
             </a:r>
-            <a:endParaRPr sz="5000"/>
-          </a:p>
-        </p:txBody>
-      </p:sp>
-      <p:sp>
-        <p:nvSpPr>
-          <p:cNvPr id="16" name="TextBox 15"/>
+            <a:endParaRPr sz="3600"/>
+          </a:p>
+        </p:txBody>
+      </p:sp>
+      <p:sp>
+        <p:nvSpPr>
+          <p:cNvPr id="19" name="TextBox 18"/>
           <p:cNvSpPr txBox="1"/>
           <p:nvPr/>
         </p:nvSpPr>
         <p:spPr>
           <a:xfrm>
-            <a:off x="2971800" y="4114800"/>
-            <a:ext cx="1965960" cy="502920"/>
+            <a:off x="2971800" y="5596128"/>
+            <a:ext cx="1965960" cy="411480"/>
           </a:xfrm>
           <a:prstGeom prst="rect">
             <a:avLst/>
@@ -10348,7 +10259,7 @@
               </a:lnSpc>
             </a:pPr>
             <a:r>
-              <a:rPr sz="2200" b="0">
+              <a:rPr sz="2000" b="0">
                 <a:solidFill>
                   <a:srgbClr val="2B2B2B"/>
                 </a:solidFill>
@@ -10358,20 +10269,20 @@
               </a:rPr>
               <a:t>客厅面积</a:t>
             </a:r>
-            <a:endParaRPr sz="2200"/>
-          </a:p>
-        </p:txBody>
-      </p:sp>
-      <p:sp>
-        <p:nvSpPr>
-          <p:cNvPr id="17" name="Rounded Rectangle 16"/>
+            <a:endParaRPr sz="2000"/>
+          </a:p>
+        </p:txBody>
+      </p:sp>
+      <p:sp>
+        <p:nvSpPr>
+          <p:cNvPr id="20" name="Rounded Rectangle 19"/>
           <p:cNvSpPr/>
           <p:nvPr/>
         </p:nvSpPr>
         <p:spPr>
           <a:xfrm>
-            <a:off x="5120640" y="2788920"/>
-            <a:ext cx="1965960" cy="2103120"/>
+            <a:off x="5120640" y="4846320"/>
+            <a:ext cx="1965960" cy="1280160"/>
           </a:xfrm>
           <a:prstGeom prst="roundRect">
             <a:avLst>
@@ -10410,14 +10321,14 @@
       </p:sp>
       <p:sp>
         <p:nvSpPr>
-          <p:cNvPr id="18" name="Rectangle 17"/>
+          <p:cNvPr id="21" name="Rectangle 20"/>
           <p:cNvSpPr/>
           <p:nvPr/>
         </p:nvSpPr>
         <p:spPr>
           <a:xfrm>
-            <a:off x="5120640" y="2788920"/>
-            <a:ext cx="1965960" cy="91440"/>
+            <a:off x="5120640" y="4846320"/>
+            <a:ext cx="1965960" cy="73152"/>
           </a:xfrm>
           <a:prstGeom prst="rect">
             <a:avLst/>
@@ -10454,14 +10365,14 @@
       </p:sp>
       <p:sp>
         <p:nvSpPr>
-          <p:cNvPr id="19" name="TextBox 18"/>
+          <p:cNvPr id="22" name="TextBox 21"/>
           <p:cNvSpPr txBox="1"/>
           <p:nvPr/>
         </p:nvSpPr>
         <p:spPr>
           <a:xfrm>
-            <a:off x="5120640" y="3017520"/>
-            <a:ext cx="1965960" cy="960120"/>
+            <a:off x="5120640" y="4937760"/>
+            <a:ext cx="1965960" cy="685800"/>
           </a:xfrm>
           <a:prstGeom prst="rect">
             <a:avLst/>
@@ -10480,7 +10391,7 @@
               </a:lnSpc>
             </a:pPr>
             <a:r>
-              <a:rPr sz="5000" b="1">
+              <a:rPr sz="3600" b="1">
                 <a:solidFill>
                   <a:srgbClr val="9E1B1B"/>
                 </a:solidFill>
@@ -10491,7 +10402,7 @@
               <a:t>50</a:t>
             </a:r>
             <a:r>
-              <a:rPr sz="2400" b="1">
+              <a:rPr sz="2000" b="1">
                 <a:solidFill>
                   <a:srgbClr val="9E1B1B"/>
                 </a:solidFill>
@@ -10501,20 +10412,20 @@
               </a:rPr>
               <a:t>多名</a:t>
             </a:r>
-            <a:endParaRPr sz="5000"/>
-          </a:p>
-        </p:txBody>
-      </p:sp>
-      <p:sp>
-        <p:nvSpPr>
-          <p:cNvPr id="20" name="TextBox 19"/>
+            <a:endParaRPr sz="3600"/>
+          </a:p>
+        </p:txBody>
+      </p:sp>
+      <p:sp>
+        <p:nvSpPr>
+          <p:cNvPr id="23" name="TextBox 22"/>
           <p:cNvSpPr txBox="1"/>
           <p:nvPr/>
         </p:nvSpPr>
         <p:spPr>
           <a:xfrm>
-            <a:off x="5120640" y="4114800"/>
-            <a:ext cx="1965960" cy="502920"/>
+            <a:off x="5120640" y="5596128"/>
+            <a:ext cx="1965960" cy="411480"/>
           </a:xfrm>
           <a:prstGeom prst="rect">
             <a:avLst/>
@@ -10533,7 +10444,7 @@
               </a:lnSpc>
             </a:pPr>
             <a:r>
-              <a:rPr sz="2200" b="0">
+              <a:rPr sz="2000" b="0">
                 <a:solidFill>
                   <a:srgbClr val="2B2B2B"/>
                 </a:solidFill>
@@ -10543,20 +10454,20 @@
               </a:rPr>
               <a:t>全国党员</a:t>
             </a:r>
-            <a:endParaRPr sz="2200"/>
-          </a:p>
-        </p:txBody>
-      </p:sp>
-      <p:sp>
-        <p:nvSpPr>
-          <p:cNvPr id="21" name="Rounded Rectangle 20"/>
+            <a:endParaRPr sz="2000"/>
+          </a:p>
+        </p:txBody>
+      </p:sp>
+      <p:sp>
+        <p:nvSpPr>
+          <p:cNvPr id="24" name="Rounded Rectangle 23"/>
           <p:cNvSpPr/>
           <p:nvPr/>
         </p:nvSpPr>
         <p:spPr>
           <a:xfrm>
-            <a:off x="7269480" y="2788920"/>
-            <a:ext cx="1965960" cy="2103120"/>
+            <a:off x="7269480" y="4846320"/>
+            <a:ext cx="1965960" cy="1280160"/>
           </a:xfrm>
           <a:prstGeom prst="roundRect">
             <a:avLst>
@@ -10595,14 +10506,14 @@
       </p:sp>
       <p:sp>
         <p:nvSpPr>
-          <p:cNvPr id="22" name="Rectangle 21"/>
+          <p:cNvPr id="25" name="Rectangle 24"/>
           <p:cNvSpPr/>
           <p:nvPr/>
         </p:nvSpPr>
         <p:spPr>
           <a:xfrm>
-            <a:off x="7269480" y="2788920"/>
-            <a:ext cx="1965960" cy="91440"/>
+            <a:off x="7269480" y="4846320"/>
+            <a:ext cx="1965960" cy="73152"/>
           </a:xfrm>
           <a:prstGeom prst="rect">
             <a:avLst/>
@@ -10639,14 +10550,14 @@
       </p:sp>
       <p:sp>
         <p:nvSpPr>
-          <p:cNvPr id="23" name="TextBox 22"/>
+          <p:cNvPr id="26" name="TextBox 25"/>
           <p:cNvSpPr txBox="1"/>
           <p:nvPr/>
         </p:nvSpPr>
         <p:spPr>
           <a:xfrm>
-            <a:off x="7269480" y="3017520"/>
-            <a:ext cx="1965960" cy="960120"/>
+            <a:off x="7269480" y="4937760"/>
+            <a:ext cx="1965960" cy="685800"/>
           </a:xfrm>
           <a:prstGeom prst="rect">
             <a:avLst/>
@@ -10665,7 +10576,7 @@
               </a:lnSpc>
             </a:pPr>
             <a:r>
-              <a:rPr sz="5000" b="1">
+              <a:rPr sz="3600" b="1">
                 <a:solidFill>
                   <a:srgbClr val="9E1B1B"/>
                 </a:solidFill>
@@ -10676,7 +10587,7 @@
               <a:t>28</a:t>
             </a:r>
             <a:r>
-              <a:rPr sz="2400" b="1">
+              <a:rPr sz="2000" b="1">
                 <a:solidFill>
                   <a:srgbClr val="9E1B1B"/>
                 </a:solidFill>
@@ -10686,20 +10597,20 @@
               </a:rPr>
               <a:t>岁</a:t>
             </a:r>
-            <a:endParaRPr sz="5000"/>
-          </a:p>
-        </p:txBody>
-      </p:sp>
-      <p:sp>
-        <p:nvSpPr>
-          <p:cNvPr id="24" name="TextBox 23"/>
+            <a:endParaRPr sz="3600"/>
+          </a:p>
+        </p:txBody>
+      </p:sp>
+      <p:sp>
+        <p:nvSpPr>
+          <p:cNvPr id="27" name="TextBox 26"/>
           <p:cNvSpPr txBox="1"/>
           <p:nvPr/>
         </p:nvSpPr>
         <p:spPr>
           <a:xfrm>
-            <a:off x="7269480" y="4114800"/>
-            <a:ext cx="1965960" cy="502920"/>
+            <a:off x="7269480" y="5596128"/>
+            <a:ext cx="1965960" cy="411480"/>
           </a:xfrm>
           <a:prstGeom prst="rect">
             <a:avLst/>
@@ -10718,7 +10629,7 @@
               </a:lnSpc>
             </a:pPr>
             <a:r>
-              <a:rPr sz="2200" b="0">
+              <a:rPr sz="2000" b="0">
                 <a:solidFill>
                   <a:srgbClr val="2B2B2B"/>
                 </a:solidFill>
@@ -10728,20 +10639,20 @@
               </a:rPr>
               <a:t>平均年龄</a:t>
             </a:r>
-            <a:endParaRPr sz="2200"/>
-          </a:p>
-        </p:txBody>
-      </p:sp>
-      <p:sp>
-        <p:nvSpPr>
-          <p:cNvPr id="25" name="Rounded Rectangle 24"/>
+            <a:endParaRPr sz="2000"/>
+          </a:p>
+        </p:txBody>
+      </p:sp>
+      <p:sp>
+        <p:nvSpPr>
+          <p:cNvPr id="28" name="Rounded Rectangle 27"/>
           <p:cNvSpPr/>
           <p:nvPr/>
         </p:nvSpPr>
         <p:spPr>
           <a:xfrm>
-            <a:off x="9418320" y="2788920"/>
-            <a:ext cx="1965960" cy="2103120"/>
+            <a:off x="9418320" y="4846320"/>
+            <a:ext cx="1965960" cy="1280160"/>
           </a:xfrm>
           <a:prstGeom prst="roundRect">
             <a:avLst>
@@ -10780,14 +10691,14 @@
       </p:sp>
       <p:sp>
         <p:nvSpPr>
-          <p:cNvPr id="26" name="Rectangle 25"/>
+          <p:cNvPr id="29" name="Rectangle 28"/>
           <p:cNvSpPr/>
           <p:nvPr/>
         </p:nvSpPr>
         <p:spPr>
           <a:xfrm>
-            <a:off x="9418320" y="2788920"/>
-            <a:ext cx="1965960" cy="91440"/>
+            <a:off x="9418320" y="4846320"/>
+            <a:ext cx="1965960" cy="73152"/>
           </a:xfrm>
           <a:prstGeom prst="rect">
             <a:avLst/>
@@ -10824,14 +10735,14 @@
       </p:sp>
       <p:sp>
         <p:nvSpPr>
-          <p:cNvPr id="27" name="TextBox 26"/>
+          <p:cNvPr id="30" name="TextBox 29"/>
           <p:cNvSpPr txBox="1"/>
           <p:nvPr/>
         </p:nvSpPr>
         <p:spPr>
           <a:xfrm>
-            <a:off x="9418320" y="3017520"/>
-            <a:ext cx="1965960" cy="960120"/>
+            <a:off x="9418320" y="4937760"/>
+            <a:ext cx="1965960" cy="685800"/>
           </a:xfrm>
           <a:prstGeom prst="rect">
             <a:avLst/>
@@ -10850,7 +10761,7 @@
               </a:lnSpc>
             </a:pPr>
             <a:r>
-              <a:rPr sz="5000" b="1">
+              <a:rPr sz="3600" b="1">
                 <a:solidFill>
                   <a:srgbClr val="9E1B1B"/>
                 </a:solidFill>
@@ -10861,7 +10772,7 @@
               <a:t>19</a:t>
             </a:r>
             <a:r>
-              <a:rPr sz="2400" b="1">
+              <a:rPr sz="2000" b="1">
                 <a:solidFill>
                   <a:srgbClr val="9E1B1B"/>
                 </a:solidFill>
@@ -10871,20 +10782,20 @@
               </a:rPr>
               <a:t>岁</a:t>
             </a:r>
-            <a:endParaRPr sz="5000"/>
-          </a:p>
-        </p:txBody>
-      </p:sp>
-      <p:sp>
-        <p:nvSpPr>
-          <p:cNvPr id="28" name="TextBox 27"/>
+            <a:endParaRPr sz="3600"/>
+          </a:p>
+        </p:txBody>
+      </p:sp>
+      <p:sp>
+        <p:nvSpPr>
+          <p:cNvPr id="31" name="TextBox 30"/>
           <p:cNvSpPr txBox="1"/>
           <p:nvPr/>
         </p:nvSpPr>
         <p:spPr>
           <a:xfrm>
-            <a:off x="9418320" y="4114800"/>
-            <a:ext cx="1965960" cy="502920"/>
+            <a:off x="9418320" y="5596128"/>
+            <a:ext cx="1965960" cy="411480"/>
           </a:xfrm>
           <a:prstGeom prst="rect">
             <a:avLst/>
@@ -10903,7 +10814,7 @@
               </a:lnSpc>
             </a:pPr>
             <a:r>
-              <a:rPr sz="2200" b="0">
+              <a:rPr sz="2000" b="0">
                 <a:solidFill>
                   <a:srgbClr val="2B2B2B"/>
                 </a:solidFill>
@@ -10913,71 +10824,7 @@
               </a:rPr>
               <a:t>最小代表</a:t>
             </a:r>
-            <a:endParaRPr sz="2200"/>
-          </a:p>
-        </p:txBody>
-      </p:sp>
-      <p:sp>
-        <p:nvSpPr>
-          <p:cNvPr id="29" name="TextBox 28"/>
-          <p:cNvSpPr txBox="1"/>
-          <p:nvPr/>
-        </p:nvSpPr>
-        <p:spPr>
-          <a:xfrm>
-            <a:off x="822960" y="5212080"/>
-            <a:ext cx="10515600" cy="822960"/>
-          </a:xfrm>
-          <a:prstGeom prst="rect">
-            <a:avLst/>
-          </a:prstGeom>
-          <a:noFill/>
-        </p:spPr>
-        <p:txBody>
-          <a:bodyPr wrap="square" anchor="ctr" lIns="36576" rIns="36576" tIns="36576" bIns="36576">
-            <a:noAutofit/>
-          </a:bodyPr>
-          <a:lstStyle/>
-          <a:p>
-            <a:pPr algn="ctr">
-              <a:lnSpc>
-                <a:spcPct val="120000"/>
-              </a:lnSpc>
-            </a:pPr>
-            <a:r>
-              <a:rPr sz="2600" b="0">
-                <a:solidFill>
-                  <a:srgbClr val="2B2B2B"/>
-                </a:solidFill>
-                <a:latin typeface="Microsoft YaHei"/>
-                <a:ea typeface="Microsoft YaHei"/>
-                <a:cs typeface="Microsoft YaHei"/>
-              </a:rPr>
-              <a:t>最小的代表才十九岁——</a:t>
-            </a:r>
-            <a:r>
-              <a:rPr sz="2600" b="1">
-                <a:solidFill>
-                  <a:srgbClr val="9E1B1B"/>
-                </a:solidFill>
-                <a:latin typeface="Microsoft YaHei"/>
-                <a:ea typeface="Microsoft YaHei"/>
-                <a:cs typeface="Microsoft YaHei"/>
-              </a:rPr>
-              <a:t>和在座很多同学差不多大</a:t>
-            </a:r>
-            <a:r>
-              <a:rPr sz="2600" b="0">
-                <a:solidFill>
-                  <a:srgbClr val="2B2B2B"/>
-                </a:solidFill>
-                <a:latin typeface="Microsoft YaHei"/>
-                <a:ea typeface="Microsoft YaHei"/>
-                <a:cs typeface="Microsoft YaHei"/>
-              </a:rPr>
-              <a:t>。</a:t>
-            </a:r>
-            <a:endParaRPr sz="2600"/>
+            <a:endParaRPr sz="2000"/>
           </a:p>
         </p:txBody>
       </p:sp>
@@ -11104,7 +10951,7 @@
         <p:spPr>
           <a:xfrm>
             <a:off x="822960" y="384048"/>
-            <a:ext cx="8229600" cy="411480"/>
+            <a:ext cx="10607040" cy="411480"/>
           </a:xfrm>
           <a:prstGeom prst="rect">
             <a:avLst/>
@@ -12119,7 +11966,7 @@
         <p:spPr>
           <a:xfrm>
             <a:off x="822960" y="384048"/>
-            <a:ext cx="8229600" cy="411480"/>
+            <a:ext cx="10607040" cy="411480"/>
           </a:xfrm>
           <a:prstGeom prst="rect">
             <a:avLst/>
@@ -12680,7 +12527,7 @@
         <p:spPr>
           <a:xfrm>
             <a:off x="822960" y="384048"/>
-            <a:ext cx="8229600" cy="411480"/>
+            <a:ext cx="10607040" cy="411480"/>
           </a:xfrm>
           <a:prstGeom prst="rect">
             <a:avLst/>
@@ -13219,7 +13066,7 @@
         <p:spPr>
           <a:xfrm>
             <a:off x="822960" y="384048"/>
-            <a:ext cx="8229600" cy="411480"/>
+            <a:ext cx="10607040" cy="411480"/>
           </a:xfrm>
           <a:prstGeom prst="rect">
             <a:avLst/>
@@ -13978,7 +13825,7 @@
         <p:spPr>
           <a:xfrm>
             <a:off x="822960" y="384048"/>
-            <a:ext cx="8229600" cy="411480"/>
+            <a:ext cx="10607040" cy="411480"/>
           </a:xfrm>
           <a:prstGeom prst="rect">
             <a:avLst/>
@@ -15291,148 +15138,40 @@
           </a:p>
         </p:txBody>
       </p:sp>
-      <p:sp>
-        <p:nvSpPr>
-          <p:cNvPr id="8" name="Rectangle 7"/>
-          <p:cNvSpPr/>
-          <p:nvPr/>
-        </p:nvSpPr>
-        <p:spPr>
-          <a:xfrm>
-            <a:off x="822960" y="4343400"/>
-            <a:ext cx="1188720" cy="1188720"/>
-          </a:xfrm>
-          <a:prstGeom prst="rect">
-            <a:avLst/>
-          </a:prstGeom>
-          <a:solidFill>
-            <a:srgbClr val="9E1B1B"/>
-          </a:solidFill>
-          <a:ln w="31750">
-            <a:solidFill>
-              <a:srgbClr val="C8A15A"/>
-            </a:solidFill>
-          </a:ln>
-          <a:effectLst/>
-        </p:spPr>
-        <p:style>
-          <a:lnRef idx="1">
-            <a:schemeClr val="accent1"/>
-          </a:lnRef>
-          <a:fillRef idx="3">
-            <a:schemeClr val="accent1"/>
-          </a:fillRef>
-          <a:effectRef idx="2">
-            <a:schemeClr val="accent1"/>
-          </a:effectRef>
-          <a:fontRef idx="minor">
-            <a:schemeClr val="lt1"/>
-          </a:fontRef>
-        </p:style>
-        <p:txBody>
-          <a:bodyPr rtlCol="0" anchor="ctr"/>
-          <a:lstStyle/>
-          <a:p>
-            <a:pPr algn="ctr"/>
-          </a:p>
-        </p:txBody>
-      </p:sp>
-      <p:sp>
-        <p:nvSpPr>
-          <p:cNvPr id="9" name="Rectangle 8"/>
-          <p:cNvSpPr/>
-          <p:nvPr/>
-        </p:nvSpPr>
-        <p:spPr>
-          <a:xfrm>
-            <a:off x="918057" y="4438497"/>
-            <a:ext cx="998524" cy="998524"/>
-          </a:xfrm>
-          <a:prstGeom prst="rect">
-            <a:avLst/>
-          </a:prstGeom>
-          <a:noFill/>
-          <a:ln w="12700">
-            <a:solidFill>
-              <a:srgbClr val="C8A15A"/>
-            </a:solidFill>
-          </a:ln>
-          <a:effectLst/>
-        </p:spPr>
-        <p:style>
-          <a:lnRef idx="1">
-            <a:schemeClr val="accent1"/>
-          </a:lnRef>
-          <a:fillRef idx="3">
-            <a:schemeClr val="accent1"/>
-          </a:fillRef>
-          <a:effectRef idx="2">
-            <a:schemeClr val="accent1"/>
-          </a:effectRef>
-          <a:fontRef idx="minor">
-            <a:schemeClr val="lt1"/>
-          </a:fontRef>
-        </p:style>
-        <p:txBody>
-          <a:bodyPr rtlCol="0" anchor="ctr"/>
-          <a:lstStyle/>
-          <a:p>
-            <a:pPr algn="ctr"/>
-          </a:p>
-        </p:txBody>
-      </p:sp>
-      <p:sp>
-        <p:nvSpPr>
-          <p:cNvPr id="10" name="TextBox 9"/>
+      <p:pic>
+        <p:nvPicPr>
+          <p:cNvPr id="8" name="Picture 7" descr="image.jpg"/>
+          <p:cNvPicPr>
+            <a:picLocks noChangeAspect="1"/>
+          </p:cNvPicPr>
+          <p:nvPr/>
+        </p:nvPicPr>
+        <p:blipFill>
+          <a:blip r:embed="rId3"/>
+          <a:stretch>
+            <a:fillRect/>
+          </a:stretch>
+        </p:blipFill>
+        <p:spPr>
+          <a:xfrm>
+            <a:off x="822960" y="4069080"/>
+            <a:ext cx="3291840" cy="2057400"/>
+          </a:xfrm>
+          <a:prstGeom prst="rect">
+            <a:avLst/>
+          </a:prstGeom>
+        </p:spPr>
+      </p:pic>
+      <p:sp>
+        <p:nvSpPr>
+          <p:cNvPr id="9" name="TextBox 8"/>
           <p:cNvSpPr txBox="1"/>
           <p:nvPr/>
         </p:nvSpPr>
         <p:spPr>
           <a:xfrm>
-            <a:off x="822960" y="4343400"/>
-            <a:ext cx="1188720" cy="1188720"/>
-          </a:xfrm>
-          <a:prstGeom prst="rect">
-            <a:avLst/>
-          </a:prstGeom>
-          <a:noFill/>
-        </p:spPr>
-        <p:txBody>
-          <a:bodyPr wrap="square" anchor="ctr" lIns="36576" rIns="36576" tIns="36576" bIns="36576">
-            <a:noAutofit/>
-          </a:bodyPr>
-          <a:lstStyle/>
-          <a:p>
-            <a:pPr algn="ctr">
-              <a:lnSpc>
-                <a:spcPct val="100000"/>
-              </a:lnSpc>
-            </a:pPr>
-            <a:r>
-              <a:rPr sz="5100" b="1">
-                <a:solidFill>
-                  <a:srgbClr val="C8A15A"/>
-                </a:solidFill>
-                <a:latin typeface="KaiTi"/>
-                <a:ea typeface="KaiTi"/>
-                <a:cs typeface="KaiTi"/>
-              </a:rPr>
-              <a:t>楼</a:t>
-            </a:r>
-            <a:endParaRPr sz="5100"/>
-          </a:p>
-        </p:txBody>
-      </p:sp>
-      <p:sp>
-        <p:nvSpPr>
-          <p:cNvPr id="11" name="TextBox 10"/>
-          <p:cNvSpPr txBox="1"/>
-          <p:nvPr/>
-        </p:nvSpPr>
-        <p:spPr>
-          <a:xfrm>
-            <a:off x="2194560" y="4389120"/>
-            <a:ext cx="2194560" cy="548640"/>
+            <a:off x="1051560" y="4343400"/>
+            <a:ext cx="2743200" cy="685800"/>
           </a:xfrm>
           <a:prstGeom prst="rect">
             <a:avLst/>
@@ -15451,9 +15190,9 @@
               </a:lnSpc>
             </a:pPr>
             <a:r>
-              <a:rPr sz="2800" b="1">
-                <a:solidFill>
-                  <a:srgbClr val="7A1212"/>
+              <a:rPr sz="3000" b="1">
+                <a:solidFill>
+                  <a:srgbClr val="FFFFFF"/>
                 </a:solidFill>
                 <a:latin typeface="Microsoft YaHei"/>
                 <a:ea typeface="Microsoft YaHei"/>
@@ -15461,20 +15200,20 @@
               </a:rPr>
               <a:t>一栋楼</a:t>
             </a:r>
-            <a:endParaRPr sz="2800"/>
-          </a:p>
-        </p:txBody>
-      </p:sp>
-      <p:sp>
-        <p:nvSpPr>
-          <p:cNvPr id="12" name="TextBox 11"/>
+            <a:endParaRPr sz="3000"/>
+          </a:p>
+        </p:txBody>
+      </p:sp>
+      <p:sp>
+        <p:nvSpPr>
+          <p:cNvPr id="10" name="TextBox 9"/>
           <p:cNvSpPr txBox="1"/>
           <p:nvPr/>
         </p:nvSpPr>
         <p:spPr>
           <a:xfrm>
-            <a:off x="2194560" y="4937760"/>
-            <a:ext cx="2194560" cy="502920"/>
+            <a:off x="1051560" y="5029200"/>
+            <a:ext cx="2743200" cy="457200"/>
           </a:xfrm>
           <a:prstGeom prst="rect">
             <a:avLst/>
@@ -15495,7 +15234,7 @@
             <a:r>
               <a:rPr sz="2200" b="0">
                 <a:solidFill>
-                  <a:srgbClr val="5A5A5A"/>
+                  <a:srgbClr val="F7E7C6"/>
                 </a:solidFill>
                 <a:latin typeface="Microsoft YaHei"/>
                 <a:ea typeface="Microsoft YaHei"/>
@@ -15507,148 +15246,40 @@
           </a:p>
         </p:txBody>
       </p:sp>
-      <p:sp>
-        <p:nvSpPr>
-          <p:cNvPr id="13" name="Rectangle 12"/>
-          <p:cNvSpPr/>
-          <p:nvPr/>
-        </p:nvSpPr>
-        <p:spPr>
-          <a:xfrm>
-            <a:off x="4434840" y="4343400"/>
-            <a:ext cx="1188720" cy="1188720"/>
-          </a:xfrm>
-          <a:prstGeom prst="rect">
-            <a:avLst/>
-          </a:prstGeom>
-          <a:solidFill>
-            <a:srgbClr val="9E1B1B"/>
-          </a:solidFill>
-          <a:ln w="31750">
-            <a:solidFill>
-              <a:srgbClr val="C8A15A"/>
-            </a:solidFill>
-          </a:ln>
-          <a:effectLst/>
-        </p:spPr>
-        <p:style>
-          <a:lnRef idx="1">
-            <a:schemeClr val="accent1"/>
-          </a:lnRef>
-          <a:fillRef idx="3">
-            <a:schemeClr val="accent1"/>
-          </a:fillRef>
-          <a:effectRef idx="2">
-            <a:schemeClr val="accent1"/>
-          </a:effectRef>
-          <a:fontRef idx="minor">
-            <a:schemeClr val="lt1"/>
-          </a:fontRef>
-        </p:style>
-        <p:txBody>
-          <a:bodyPr rtlCol="0" anchor="ctr"/>
-          <a:lstStyle/>
-          <a:p>
-            <a:pPr algn="ctr"/>
-          </a:p>
-        </p:txBody>
-      </p:sp>
-      <p:sp>
-        <p:nvSpPr>
-          <p:cNvPr id="14" name="Rectangle 13"/>
-          <p:cNvSpPr/>
-          <p:nvPr/>
-        </p:nvSpPr>
-        <p:spPr>
-          <a:xfrm>
-            <a:off x="4529937" y="4438497"/>
-            <a:ext cx="998524" cy="998524"/>
-          </a:xfrm>
-          <a:prstGeom prst="rect">
-            <a:avLst/>
-          </a:prstGeom>
-          <a:noFill/>
-          <a:ln w="12700">
-            <a:solidFill>
-              <a:srgbClr val="C8A15A"/>
-            </a:solidFill>
-          </a:ln>
-          <a:effectLst/>
-        </p:spPr>
-        <p:style>
-          <a:lnRef idx="1">
-            <a:schemeClr val="accent1"/>
-          </a:lnRef>
-          <a:fillRef idx="3">
-            <a:schemeClr val="accent1"/>
-          </a:fillRef>
-          <a:effectRef idx="2">
-            <a:schemeClr val="accent1"/>
-          </a:effectRef>
-          <a:fontRef idx="minor">
-            <a:schemeClr val="lt1"/>
-          </a:fontRef>
-        </p:style>
-        <p:txBody>
-          <a:bodyPr rtlCol="0" anchor="ctr"/>
-          <a:lstStyle/>
-          <a:p>
-            <a:pPr algn="ctr"/>
-          </a:p>
-        </p:txBody>
-      </p:sp>
-      <p:sp>
-        <p:nvSpPr>
-          <p:cNvPr id="15" name="TextBox 14"/>
+      <p:pic>
+        <p:nvPicPr>
+          <p:cNvPr id="11" name="Picture 10" descr="image.jpg"/>
+          <p:cNvPicPr>
+            <a:picLocks noChangeAspect="1"/>
+          </p:cNvPicPr>
+          <p:nvPr/>
+        </p:nvPicPr>
+        <p:blipFill>
+          <a:blip r:embed="rId4"/>
+          <a:stretch>
+            <a:fillRect/>
+          </a:stretch>
+        </p:blipFill>
+        <p:spPr>
+          <a:xfrm>
+            <a:off x="4434840" y="4069080"/>
+            <a:ext cx="3291840" cy="2057400"/>
+          </a:xfrm>
+          <a:prstGeom prst="rect">
+            <a:avLst/>
+          </a:prstGeom>
+        </p:spPr>
+      </p:pic>
+      <p:sp>
+        <p:nvSpPr>
+          <p:cNvPr id="12" name="TextBox 11"/>
           <p:cNvSpPr txBox="1"/>
           <p:nvPr/>
         </p:nvSpPr>
         <p:spPr>
           <a:xfrm>
-            <a:off x="4434840" y="4343400"/>
-            <a:ext cx="1188720" cy="1188720"/>
-          </a:xfrm>
-          <a:prstGeom prst="rect">
-            <a:avLst/>
-          </a:prstGeom>
-          <a:noFill/>
-        </p:spPr>
-        <p:txBody>
-          <a:bodyPr wrap="square" anchor="ctr" lIns="36576" rIns="36576" tIns="36576" bIns="36576">
-            <a:noAutofit/>
-          </a:bodyPr>
-          <a:lstStyle/>
-          <a:p>
-            <a:pPr algn="ctr">
-              <a:lnSpc>
-                <a:spcPct val="100000"/>
-              </a:lnSpc>
-            </a:pPr>
-            <a:r>
-              <a:rPr sz="5100" b="1">
-                <a:solidFill>
-                  <a:srgbClr val="C8A15A"/>
-                </a:solidFill>
-                <a:latin typeface="KaiTi"/>
-                <a:ea typeface="KaiTi"/>
-                <a:cs typeface="KaiTi"/>
-              </a:rPr>
-              <a:t>房</a:t>
-            </a:r>
-            <a:endParaRPr sz="5100"/>
-          </a:p>
-        </p:txBody>
-      </p:sp>
-      <p:sp>
-        <p:nvSpPr>
-          <p:cNvPr id="16" name="TextBox 15"/>
-          <p:cNvSpPr txBox="1"/>
-          <p:nvPr/>
-        </p:nvSpPr>
-        <p:spPr>
-          <a:xfrm>
-            <a:off x="5806440" y="4389120"/>
-            <a:ext cx="2194560" cy="548640"/>
+            <a:off x="4663440" y="4343400"/>
+            <a:ext cx="2743200" cy="685800"/>
           </a:xfrm>
           <a:prstGeom prst="rect">
             <a:avLst/>
@@ -15667,9 +15298,9 @@
               </a:lnSpc>
             </a:pPr>
             <a:r>
-              <a:rPr sz="2800" b="1">
-                <a:solidFill>
-                  <a:srgbClr val="7A1212"/>
+              <a:rPr sz="3000" b="1">
+                <a:solidFill>
+                  <a:srgbClr val="FFFFFF"/>
                 </a:solidFill>
                 <a:latin typeface="Microsoft YaHei"/>
                 <a:ea typeface="Microsoft YaHei"/>
@@ -15677,20 +15308,20 @@
               </a:rPr>
               <a:t>一幢房</a:t>
             </a:r>
-            <a:endParaRPr sz="2800"/>
-          </a:p>
-        </p:txBody>
-      </p:sp>
-      <p:sp>
-        <p:nvSpPr>
-          <p:cNvPr id="17" name="TextBox 16"/>
+            <a:endParaRPr sz="3000"/>
+          </a:p>
+        </p:txBody>
+      </p:sp>
+      <p:sp>
+        <p:nvSpPr>
+          <p:cNvPr id="13" name="TextBox 12"/>
           <p:cNvSpPr txBox="1"/>
           <p:nvPr/>
         </p:nvSpPr>
         <p:spPr>
           <a:xfrm>
-            <a:off x="5806440" y="4937760"/>
-            <a:ext cx="2194560" cy="502920"/>
+            <a:off x="4663440" y="5029200"/>
+            <a:ext cx="2743200" cy="457200"/>
           </a:xfrm>
           <a:prstGeom prst="rect">
             <a:avLst/>
@@ -15711,7 +15342,7 @@
             <a:r>
               <a:rPr sz="2200" b="0">
                 <a:solidFill>
-                  <a:srgbClr val="5A5A5A"/>
+                  <a:srgbClr val="F7E7C6"/>
                 </a:solidFill>
                 <a:latin typeface="Microsoft YaHei"/>
                 <a:ea typeface="Microsoft YaHei"/>
@@ -15723,148 +15354,40 @@
           </a:p>
         </p:txBody>
       </p:sp>
-      <p:sp>
-        <p:nvSpPr>
-          <p:cNvPr id="18" name="Rectangle 17"/>
-          <p:cNvSpPr/>
-          <p:nvPr/>
-        </p:nvSpPr>
-        <p:spPr>
-          <a:xfrm>
-            <a:off x="8046720" y="4343400"/>
-            <a:ext cx="1188720" cy="1188720"/>
-          </a:xfrm>
-          <a:prstGeom prst="rect">
-            <a:avLst/>
-          </a:prstGeom>
-          <a:solidFill>
-            <a:srgbClr val="9E1B1B"/>
-          </a:solidFill>
-          <a:ln w="31750">
-            <a:solidFill>
-              <a:srgbClr val="C8A15A"/>
-            </a:solidFill>
-          </a:ln>
-          <a:effectLst/>
-        </p:spPr>
-        <p:style>
-          <a:lnRef idx="1">
-            <a:schemeClr val="accent1"/>
-          </a:lnRef>
-          <a:fillRef idx="3">
-            <a:schemeClr val="accent1"/>
-          </a:fillRef>
-          <a:effectRef idx="2">
-            <a:schemeClr val="accent1"/>
-          </a:effectRef>
-          <a:fontRef idx="minor">
-            <a:schemeClr val="lt1"/>
-          </a:fontRef>
-        </p:style>
-        <p:txBody>
-          <a:bodyPr rtlCol="0" anchor="ctr"/>
-          <a:lstStyle/>
-          <a:p>
-            <a:pPr algn="ctr"/>
-          </a:p>
-        </p:txBody>
-      </p:sp>
-      <p:sp>
-        <p:nvSpPr>
-          <p:cNvPr id="19" name="Rectangle 18"/>
-          <p:cNvSpPr/>
-          <p:nvPr/>
-        </p:nvSpPr>
-        <p:spPr>
-          <a:xfrm>
-            <a:off x="8141817" y="4438497"/>
-            <a:ext cx="998524" cy="998524"/>
-          </a:xfrm>
-          <a:prstGeom prst="rect">
-            <a:avLst/>
-          </a:prstGeom>
-          <a:noFill/>
-          <a:ln w="12700">
-            <a:solidFill>
-              <a:srgbClr val="C8A15A"/>
-            </a:solidFill>
-          </a:ln>
-          <a:effectLst/>
-        </p:spPr>
-        <p:style>
-          <a:lnRef idx="1">
-            <a:schemeClr val="accent1"/>
-          </a:lnRef>
-          <a:fillRef idx="3">
-            <a:schemeClr val="accent1"/>
-          </a:fillRef>
-          <a:effectRef idx="2">
-            <a:schemeClr val="accent1"/>
-          </a:effectRef>
-          <a:fontRef idx="minor">
-            <a:schemeClr val="lt1"/>
-          </a:fontRef>
-        </p:style>
-        <p:txBody>
-          <a:bodyPr rtlCol="0" anchor="ctr"/>
-          <a:lstStyle/>
-          <a:p>
-            <a:pPr algn="ctr"/>
-          </a:p>
-        </p:txBody>
-      </p:sp>
-      <p:sp>
-        <p:nvSpPr>
-          <p:cNvPr id="20" name="TextBox 19"/>
+      <p:pic>
+        <p:nvPicPr>
+          <p:cNvPr id="14" name="Picture 13" descr="image.jpg"/>
+          <p:cNvPicPr>
+            <a:picLocks noChangeAspect="1"/>
+          </p:cNvPicPr>
+          <p:nvPr/>
+        </p:nvPicPr>
+        <p:blipFill>
+          <a:blip r:embed="rId5"/>
+          <a:stretch>
+            <a:fillRect/>
+          </a:stretch>
+        </p:blipFill>
+        <p:spPr>
+          <a:xfrm>
+            <a:off x="8046720" y="4069080"/>
+            <a:ext cx="3291840" cy="2057400"/>
+          </a:xfrm>
+          <a:prstGeom prst="rect">
+            <a:avLst/>
+          </a:prstGeom>
+        </p:spPr>
+      </p:pic>
+      <p:sp>
+        <p:nvSpPr>
+          <p:cNvPr id="15" name="TextBox 14"/>
           <p:cNvSpPr txBox="1"/>
           <p:nvPr/>
         </p:nvSpPr>
         <p:spPr>
           <a:xfrm>
-            <a:off x="8046720" y="4343400"/>
-            <a:ext cx="1188720" cy="1188720"/>
-          </a:xfrm>
-          <a:prstGeom prst="rect">
-            <a:avLst/>
-          </a:prstGeom>
-          <a:noFill/>
-        </p:spPr>
-        <p:txBody>
-          <a:bodyPr wrap="square" anchor="ctr" lIns="36576" rIns="36576" tIns="36576" bIns="36576">
-            <a:noAutofit/>
-          </a:bodyPr>
-          <a:lstStyle/>
-          <a:p>
-            <a:pPr algn="ctr">
-              <a:lnSpc>
-                <a:spcPct val="100000"/>
-              </a:lnSpc>
-            </a:pPr>
-            <a:r>
-              <a:rPr sz="5100" b="1">
-                <a:solidFill>
-                  <a:srgbClr val="C8A15A"/>
-                </a:solidFill>
-                <a:latin typeface="KaiTi"/>
-                <a:ea typeface="KaiTi"/>
-                <a:cs typeface="KaiTi"/>
-              </a:rPr>
-              <a:t>船</a:t>
-            </a:r>
-            <a:endParaRPr sz="5100"/>
-          </a:p>
-        </p:txBody>
-      </p:sp>
-      <p:sp>
-        <p:nvSpPr>
-          <p:cNvPr id="21" name="TextBox 20"/>
-          <p:cNvSpPr txBox="1"/>
-          <p:nvPr/>
-        </p:nvSpPr>
-        <p:spPr>
-          <a:xfrm>
-            <a:off x="9418320" y="4389120"/>
-            <a:ext cx="2194560" cy="548640"/>
+            <a:off x="8275320" y="4343400"/>
+            <a:ext cx="2743200" cy="685800"/>
           </a:xfrm>
           <a:prstGeom prst="rect">
             <a:avLst/>
@@ -15883,9 +15406,9 @@
               </a:lnSpc>
             </a:pPr>
             <a:r>
-              <a:rPr sz="2800" b="1">
-                <a:solidFill>
-                  <a:srgbClr val="7A1212"/>
+              <a:rPr sz="3000" b="1">
+                <a:solidFill>
+                  <a:srgbClr val="FFFFFF"/>
                 </a:solidFill>
                 <a:latin typeface="Microsoft YaHei"/>
                 <a:ea typeface="Microsoft YaHei"/>
@@ -15893,20 +15416,20 @@
               </a:rPr>
               <a:t>一只船</a:t>
             </a:r>
-            <a:endParaRPr sz="2800"/>
-          </a:p>
-        </p:txBody>
-      </p:sp>
-      <p:sp>
-        <p:nvSpPr>
-          <p:cNvPr id="22" name="TextBox 21"/>
+            <a:endParaRPr sz="3000"/>
+          </a:p>
+        </p:txBody>
+      </p:sp>
+      <p:sp>
+        <p:nvSpPr>
+          <p:cNvPr id="16" name="TextBox 15"/>
           <p:cNvSpPr txBox="1"/>
           <p:nvPr/>
         </p:nvSpPr>
         <p:spPr>
           <a:xfrm>
-            <a:off x="9418320" y="4937760"/>
-            <a:ext cx="2194560" cy="502920"/>
+            <a:off x="8275320" y="5029200"/>
+            <a:ext cx="2743200" cy="457200"/>
           </a:xfrm>
           <a:prstGeom prst="rect">
             <a:avLst/>
@@ -15927,7 +15450,7 @@
             <a:r>
               <a:rPr sz="2200" b="0">
                 <a:solidFill>
-                  <a:srgbClr val="5A5A5A"/>
+                  <a:srgbClr val="F7E7C6"/>
                 </a:solidFill>
                 <a:latin typeface="Microsoft YaHei"/>
                 <a:ea typeface="Microsoft YaHei"/>
@@ -15965,16 +15488,40 @@
         <p:nvPr/>
       </p:nvGrpSpPr>
       <p:grpSpPr/>
-      <p:sp>
-        <p:nvSpPr>
-          <p:cNvPr id="2" name="Rectangle 1"/>
+      <p:pic>
+        <p:nvPicPr>
+          <p:cNvPr id="2" name="Picture 1" descr="image.jpg"/>
+          <p:cNvPicPr>
+            <a:picLocks noChangeAspect="1"/>
+          </p:cNvPicPr>
+          <p:nvPr/>
+        </p:nvPicPr>
+        <p:blipFill>
+          <a:blip r:embed="rId3"/>
+          <a:stretch>
+            <a:fillRect/>
+          </a:stretch>
+        </p:blipFill>
+        <p:spPr>
+          <a:xfrm>
+            <a:off x="0" y="0"/>
+            <a:ext cx="6217920" cy="6858000"/>
+          </a:xfrm>
+          <a:prstGeom prst="rect">
+            <a:avLst/>
+          </a:prstGeom>
+        </p:spPr>
+      </p:pic>
+      <p:sp>
+        <p:nvSpPr>
+          <p:cNvPr id="3" name="Rectangle 2"/>
           <p:cNvSpPr/>
           <p:nvPr/>
         </p:nvSpPr>
         <p:spPr>
           <a:xfrm>
-            <a:off x="0" y="411480"/>
-            <a:ext cx="12191695" cy="36576"/>
+            <a:off x="5943600" y="411480"/>
+            <a:ext cx="6248095" cy="36576"/>
           </a:xfrm>
           <a:prstGeom prst="rect">
             <a:avLst/>
@@ -16011,14 +15558,14 @@
       </p:sp>
       <p:sp>
         <p:nvSpPr>
-          <p:cNvPr id="3" name="Rectangle 2"/>
+          <p:cNvPr id="4" name="Rectangle 3"/>
           <p:cNvSpPr/>
           <p:nvPr/>
         </p:nvSpPr>
         <p:spPr>
           <a:xfrm>
-            <a:off x="0" y="6409944"/>
-            <a:ext cx="12191695" cy="36576"/>
+            <a:off x="5943600" y="6409944"/>
+            <a:ext cx="6248095" cy="36576"/>
           </a:xfrm>
           <a:prstGeom prst="rect">
             <a:avLst/>
@@ -16055,14 +15602,14 @@
       </p:sp>
       <p:sp>
         <p:nvSpPr>
-          <p:cNvPr id="4" name="Rectangle 3"/>
+          <p:cNvPr id="5" name="Rectangle 4"/>
           <p:cNvSpPr/>
           <p:nvPr/>
         </p:nvSpPr>
         <p:spPr>
           <a:xfrm>
-            <a:off x="1554480" y="1737360"/>
-            <a:ext cx="3108960" cy="3108960"/>
+            <a:off x="6400800" y="914400"/>
+            <a:ext cx="914400" cy="914400"/>
           </a:xfrm>
           <a:prstGeom prst="rect">
             <a:avLst/>
@@ -16101,14 +15648,14 @@
       </p:sp>
       <p:sp>
         <p:nvSpPr>
-          <p:cNvPr id="5" name="Rectangle 4"/>
+          <p:cNvPr id="6" name="Rectangle 5"/>
           <p:cNvSpPr/>
           <p:nvPr/>
         </p:nvSpPr>
         <p:spPr>
           <a:xfrm>
-            <a:off x="1803196" y="1986076"/>
-            <a:ext cx="2611526" cy="2611526"/>
+            <a:off x="6473952" y="987552"/>
+            <a:ext cx="768096" cy="768096"/>
           </a:xfrm>
           <a:prstGeom prst="rect">
             <a:avLst/>
@@ -16145,14 +15692,14 @@
       </p:sp>
       <p:sp>
         <p:nvSpPr>
-          <p:cNvPr id="6" name="TextBox 5"/>
+          <p:cNvPr id="7" name="TextBox 6"/>
           <p:cNvSpPr txBox="1"/>
           <p:nvPr/>
         </p:nvSpPr>
         <p:spPr>
           <a:xfrm>
-            <a:off x="1554480" y="1737360"/>
-            <a:ext cx="3108960" cy="3108960"/>
+            <a:off x="6400800" y="914400"/>
+            <a:ext cx="914400" cy="914400"/>
           </a:xfrm>
           <a:prstGeom prst="rect">
             <a:avLst/>
@@ -16171,7 +15718,7 @@
               </a:lnSpc>
             </a:pPr>
             <a:r>
-              <a:rPr sz="13400" b="1">
+              <a:rPr sz="3900" b="1">
                 <a:solidFill>
                   <a:srgbClr val="C8A15A"/>
                 </a:solidFill>
@@ -16181,20 +15728,20 @@
               </a:rPr>
               <a:t>船</a:t>
             </a:r>
-            <a:endParaRPr sz="13400"/>
-          </a:p>
-        </p:txBody>
-      </p:sp>
-      <p:sp>
-        <p:nvSpPr>
-          <p:cNvPr id="7" name="TextBox 6"/>
+            <a:endParaRPr sz="3900"/>
+          </a:p>
+        </p:txBody>
+      </p:sp>
+      <p:sp>
+        <p:nvSpPr>
+          <p:cNvPr id="8" name="TextBox 7"/>
           <p:cNvSpPr txBox="1"/>
           <p:nvPr/>
         </p:nvSpPr>
         <p:spPr>
           <a:xfrm>
-            <a:off x="5394960" y="1783080"/>
-            <a:ext cx="6400800" cy="548640"/>
+            <a:off x="6400800" y="2011680"/>
+            <a:ext cx="5486400" cy="548640"/>
           </a:xfrm>
           <a:prstGeom prst="rect">
             <a:avLst/>
@@ -16229,14 +15776,14 @@
       </p:sp>
       <p:sp>
         <p:nvSpPr>
-          <p:cNvPr id="8" name="TextBox 7"/>
+          <p:cNvPr id="9" name="TextBox 8"/>
           <p:cNvSpPr txBox="1"/>
           <p:nvPr/>
         </p:nvSpPr>
         <p:spPr>
           <a:xfrm>
-            <a:off x="5394960" y="2377440"/>
-            <a:ext cx="6400800" cy="1188720"/>
+            <a:off x="6400800" y="2606040"/>
+            <a:ext cx="5486400" cy="1188720"/>
           </a:xfrm>
           <a:prstGeom prst="rect">
             <a:avLst/>
@@ -16271,14 +15818,14 @@
       </p:sp>
       <p:sp>
         <p:nvSpPr>
-          <p:cNvPr id="9" name="TextBox 8"/>
+          <p:cNvPr id="10" name="TextBox 9"/>
           <p:cNvSpPr txBox="1"/>
           <p:nvPr/>
         </p:nvSpPr>
         <p:spPr>
           <a:xfrm>
-            <a:off x="5394960" y="3657600"/>
-            <a:ext cx="6400800" cy="594360"/>
+            <a:off x="6400800" y="3886200"/>
+            <a:ext cx="5486400" cy="594360"/>
           </a:xfrm>
           <a:prstGeom prst="rect">
             <a:avLst/>
@@ -16313,14 +15860,14 @@
       </p:sp>
       <p:sp>
         <p:nvSpPr>
-          <p:cNvPr id="10" name="TextBox 9"/>
+          <p:cNvPr id="11" name="TextBox 10"/>
           <p:cNvSpPr txBox="1"/>
           <p:nvPr/>
         </p:nvSpPr>
         <p:spPr>
           <a:xfrm>
-            <a:off x="5394960" y="4343400"/>
-            <a:ext cx="6400800" cy="502920"/>
+            <a:off x="6400800" y="4572000"/>
+            <a:ext cx="5486400" cy="502920"/>
           </a:xfrm>
           <a:prstGeom prst="rect">
             <a:avLst/>
@@ -16355,7 +15902,7 @@
       </p:sp>
       <p:sp>
         <p:nvSpPr>
-          <p:cNvPr id="11" name="TextBox 10"/>
+          <p:cNvPr id="12" name="TextBox 11"/>
           <p:cNvSpPr txBox="1"/>
           <p:nvPr/>
         </p:nvSpPr>
@@ -16383,7 +15930,7 @@
             <a:r>
               <a:rPr sz="2000" b="0">
                 <a:solidFill>
-                  <a:srgbClr val="C8A15A"/>
+                  <a:srgbClr val="F7E7C6"/>
                 </a:solidFill>
                 <a:latin typeface="Microsoft YaHei"/>
                 <a:ea typeface="Microsoft YaHei"/>
@@ -16409,7 +15956,7 @@
     <p:bg>
       <p:bgPr>
         <a:solidFill>
-          <a:srgbClr val="FBF6EE"/>
+          <a:srgbClr val="7A1212"/>
         </a:solidFill>
         <a:effectLst/>
       </p:bgPr>
@@ -16421,60 +15968,124 @@
         <p:nvPr/>
       </p:nvGrpSpPr>
       <p:grpSpPr/>
-      <p:sp>
-        <p:nvSpPr>
-          <p:cNvPr id="2" name="Rectangle 1"/>
+      <p:pic>
+        <p:nvPicPr>
+          <p:cNvPr id="2" name="Picture 1" descr="image.jpg"/>
+          <p:cNvPicPr>
+            <a:picLocks noChangeAspect="1"/>
+          </p:cNvPicPr>
+          <p:nvPr/>
+        </p:nvPicPr>
+        <p:blipFill>
+          <a:blip r:embed="rId3"/>
+          <a:stretch>
+            <a:fillRect/>
+          </a:stretch>
+        </p:blipFill>
+        <p:spPr>
+          <a:xfrm>
+            <a:off x="0" y="0"/>
+            <a:ext cx="12191695" cy="4023360"/>
+          </a:xfrm>
+          <a:prstGeom prst="rect">
+            <a:avLst/>
+          </a:prstGeom>
+        </p:spPr>
+      </p:pic>
+      <p:sp>
+        <p:nvSpPr>
+          <p:cNvPr id="3" name="TextBox 2"/>
+          <p:cNvSpPr txBox="1"/>
+          <p:nvPr/>
+        </p:nvSpPr>
+        <p:spPr>
+          <a:xfrm>
+            <a:off x="822960" y="3246120"/>
+            <a:ext cx="10515600" cy="411480"/>
+          </a:xfrm>
+          <a:prstGeom prst="rect">
+            <a:avLst/>
+          </a:prstGeom>
+          <a:noFill/>
+        </p:spPr>
+        <p:txBody>
+          <a:bodyPr wrap="square" anchor="t" lIns="36576" rIns="36576" tIns="36576" bIns="36576">
+            <a:noAutofit/>
+          </a:bodyPr>
+          <a:lstStyle/>
+          <a:p>
+            <a:pPr algn="l">
+              <a:lnSpc>
+                <a:spcPct val="120000"/>
+              </a:lnSpc>
+            </a:pPr>
+            <a:r>
+              <a:rPr sz="2000" b="1">
+                <a:solidFill>
+                  <a:srgbClr val="C8A15A"/>
+                </a:solidFill>
+                <a:latin typeface="Microsoft YaHei"/>
+                <a:ea typeface="Microsoft YaHei"/>
+                <a:cs typeface="Microsoft YaHei"/>
+              </a:rPr>
+              <a:t>第三节 · 一只船</a:t>
+            </a:r>
+            <a:endParaRPr sz="2000"/>
+          </a:p>
+        </p:txBody>
+      </p:sp>
+      <p:sp>
+        <p:nvSpPr>
+          <p:cNvPr id="4" name="TextBox 3"/>
+          <p:cNvSpPr txBox="1"/>
+          <p:nvPr/>
+        </p:nvSpPr>
+        <p:spPr>
+          <a:xfrm>
+            <a:off x="822960" y="3611880"/>
+            <a:ext cx="10515600" cy="685800"/>
+          </a:xfrm>
+          <a:prstGeom prst="rect">
+            <a:avLst/>
+          </a:prstGeom>
+          <a:noFill/>
+        </p:spPr>
+        <p:txBody>
+          <a:bodyPr wrap="square" anchor="t" lIns="36576" rIns="36576" tIns="36576" bIns="36576">
+            <a:noAutofit/>
+          </a:bodyPr>
+          <a:lstStyle/>
+          <a:p>
+            <a:pPr algn="l">
+              <a:lnSpc>
+                <a:spcPct val="120000"/>
+              </a:lnSpc>
+            </a:pPr>
+            <a:r>
+              <a:rPr sz="3400" b="1">
+                <a:solidFill>
+                  <a:srgbClr val="FFFFFF"/>
+                </a:solidFill>
+                <a:latin typeface="Microsoft YaHei"/>
+                <a:ea typeface="Microsoft YaHei"/>
+                <a:cs typeface="Microsoft YaHei"/>
+              </a:rPr>
+              <a:t>梁衡站在船边写下</a:t>
+            </a:r>
+            <a:endParaRPr sz="3400"/>
+          </a:p>
+        </p:txBody>
+      </p:sp>
+      <p:sp>
+        <p:nvSpPr>
+          <p:cNvPr id="5" name="Rectangle 4"/>
           <p:cNvSpPr/>
           <p:nvPr/>
         </p:nvSpPr>
         <p:spPr>
           <a:xfrm>
-            <a:off x="0" y="0"/>
-            <a:ext cx="201168" cy="6858000"/>
-          </a:xfrm>
-          <a:prstGeom prst="rect">
-            <a:avLst/>
-          </a:prstGeom>
-          <a:solidFill>
-            <a:srgbClr val="9E1B1B"/>
-          </a:solidFill>
-          <a:ln>
-            <a:noFill/>
-          </a:ln>
-          <a:effectLst/>
-        </p:spPr>
-        <p:style>
-          <a:lnRef idx="1">
-            <a:schemeClr val="accent1"/>
-          </a:lnRef>
-          <a:fillRef idx="3">
-            <a:schemeClr val="accent1"/>
-          </a:fillRef>
-          <a:effectRef idx="2">
-            <a:schemeClr val="accent1"/>
-          </a:effectRef>
-          <a:fontRef idx="minor">
-            <a:schemeClr val="lt1"/>
-          </a:fontRef>
-        </p:style>
-        <p:txBody>
-          <a:bodyPr rtlCol="0" anchor="ctr"/>
-          <a:lstStyle/>
-          <a:p>
-            <a:pPr algn="ctr"/>
-          </a:p>
-        </p:txBody>
-      </p:sp>
-      <p:sp>
-        <p:nvSpPr>
-          <p:cNvPr id="3" name="Rectangle 2"/>
-          <p:cNvSpPr/>
-          <p:nvPr/>
-        </p:nvSpPr>
-        <p:spPr>
-          <a:xfrm>
-            <a:off x="201168" y="0"/>
-            <a:ext cx="54864" cy="6858000"/>
+            <a:off x="822960" y="4434840"/>
+            <a:ext cx="73152" cy="731520"/>
           </a:xfrm>
           <a:prstGeom prst="rect">
             <a:avLst/>
@@ -16511,98 +16122,56 @@
       </p:sp>
       <p:sp>
         <p:nvSpPr>
-          <p:cNvPr id="4" name="TextBox 3"/>
+          <p:cNvPr id="6" name="TextBox 5"/>
           <p:cNvSpPr txBox="1"/>
           <p:nvPr/>
         </p:nvSpPr>
         <p:spPr>
           <a:xfrm>
-            <a:off x="822960" y="384048"/>
-            <a:ext cx="8229600" cy="411480"/>
-          </a:xfrm>
-          <a:prstGeom prst="rect">
-            <a:avLst/>
-          </a:prstGeom>
-          <a:noFill/>
-        </p:spPr>
-        <p:txBody>
-          <a:bodyPr wrap="square" anchor="t" lIns="36576" rIns="36576" tIns="36576" bIns="36576">
+            <a:off x="1097280" y="4389120"/>
+            <a:ext cx="10241280" cy="822960"/>
+          </a:xfrm>
+          <a:prstGeom prst="rect">
+            <a:avLst/>
+          </a:prstGeom>
+          <a:noFill/>
+        </p:spPr>
+        <p:txBody>
+          <a:bodyPr wrap="square" anchor="ctr" lIns="36576" rIns="36576" tIns="36576" bIns="36576">
             <a:noAutofit/>
           </a:bodyPr>
           <a:lstStyle/>
           <a:p>
             <a:pPr algn="l">
               <a:lnSpc>
-                <a:spcPct val="120000"/>
-              </a:lnSpc>
-            </a:pPr>
-            <a:r>
-              <a:rPr sz="2000" b="1">
-                <a:solidFill>
-                  <a:srgbClr val="C8A15A"/>
-                </a:solidFill>
-                <a:latin typeface="Microsoft YaHei"/>
-                <a:ea typeface="Microsoft YaHei"/>
-                <a:cs typeface="Microsoft YaHei"/>
-              </a:rPr>
-              <a:t>第三节 · 一只船</a:t>
-            </a:r>
-            <a:endParaRPr sz="2000"/>
-          </a:p>
-        </p:txBody>
-      </p:sp>
-      <p:sp>
-        <p:nvSpPr>
-          <p:cNvPr id="5" name="TextBox 4"/>
-          <p:cNvSpPr txBox="1"/>
-          <p:nvPr/>
-        </p:nvSpPr>
-        <p:spPr>
-          <a:xfrm>
-            <a:off x="822960" y="749808"/>
-            <a:ext cx="10607040" cy="777240"/>
-          </a:xfrm>
-          <a:prstGeom prst="rect">
-            <a:avLst/>
-          </a:prstGeom>
-          <a:noFill/>
-        </p:spPr>
-        <p:txBody>
-          <a:bodyPr wrap="square" anchor="t" lIns="36576" rIns="36576" tIns="36576" bIns="36576">
-            <a:noAutofit/>
-          </a:bodyPr>
-          <a:lstStyle/>
-          <a:p>
-            <a:pPr algn="l">
-              <a:lnSpc>
-                <a:spcPct val="120000"/>
-              </a:lnSpc>
-            </a:pPr>
-            <a:r>
-              <a:rPr sz="3600" b="1">
-                <a:solidFill>
-                  <a:srgbClr val="7A1212"/>
-                </a:solidFill>
-                <a:latin typeface="Microsoft YaHei"/>
-                <a:ea typeface="Microsoft YaHei"/>
-                <a:cs typeface="Microsoft YaHei"/>
-              </a:rPr>
-              <a:t>梁衡站在船边写下</a:t>
-            </a:r>
-            <a:endParaRPr sz="3600"/>
-          </a:p>
-        </p:txBody>
-      </p:sp>
-      <p:sp>
-        <p:nvSpPr>
-          <p:cNvPr id="6" name="Rectangle 5"/>
+                <a:spcPct val="110000"/>
+              </a:lnSpc>
+            </a:pPr>
+            <a:r>
+              <a:rPr sz="2600" b="0">
+                <a:solidFill>
+                  <a:srgbClr val="FFFFFF"/>
+                </a:solidFill>
+                <a:latin typeface="KaiTi"/>
+                <a:ea typeface="KaiTi"/>
+                <a:cs typeface="KaiTi"/>
+              </a:rPr>
+              <a:t>“这是一只多么小的船啊，要低头弯腰才能进入舱内，刚能容下十几个人促膝侧坐。”</a:t>
+            </a:r>
+            <a:endParaRPr sz="2600"/>
+          </a:p>
+        </p:txBody>
+      </p:sp>
+      <p:sp>
+        <p:nvSpPr>
+          <p:cNvPr id="7" name="Rectangle 6"/>
           <p:cNvSpPr/>
           <p:nvPr/>
         </p:nvSpPr>
         <p:spPr>
           <a:xfrm>
-            <a:off x="822960" y="1572768"/>
-            <a:ext cx="1097280" cy="54864"/>
+            <a:off x="822960" y="5349240"/>
+            <a:ext cx="73152" cy="731520"/>
           </a:xfrm>
           <a:prstGeom prst="rect">
             <a:avLst/>
@@ -16639,7 +16208,49 @@
       </p:sp>
       <p:sp>
         <p:nvSpPr>
-          <p:cNvPr id="7" name="TextBox 6"/>
+          <p:cNvPr id="8" name="TextBox 7"/>
+          <p:cNvSpPr txBox="1"/>
+          <p:nvPr/>
+        </p:nvSpPr>
+        <p:spPr>
+          <a:xfrm>
+            <a:off x="1097280" y="5303520"/>
+            <a:ext cx="10241280" cy="822960"/>
+          </a:xfrm>
+          <a:prstGeom prst="rect">
+            <a:avLst/>
+          </a:prstGeom>
+          <a:noFill/>
+        </p:spPr>
+        <p:txBody>
+          <a:bodyPr wrap="square" anchor="ctr" lIns="36576" rIns="36576" tIns="36576" bIns="36576">
+            <a:noAutofit/>
+          </a:bodyPr>
+          <a:lstStyle/>
+          <a:p>
+            <a:pPr algn="l">
+              <a:lnSpc>
+                <a:spcPct val="110000"/>
+              </a:lnSpc>
+            </a:pPr>
+            <a:r>
+              <a:rPr sz="2600" b="0">
+                <a:solidFill>
+                  <a:srgbClr val="FFFFFF"/>
+                </a:solidFill>
+                <a:latin typeface="KaiTi"/>
+                <a:ea typeface="KaiTi"/>
+                <a:cs typeface="KaiTi"/>
+              </a:rPr>
+              <a:t>“我真不敢想，我们轰轰烈烈、排山倒海的八十年就是从这条船舱里倾泻出来的吗？”</a:t>
+            </a:r>
+            <a:endParaRPr sz="2600"/>
+          </a:p>
+        </p:txBody>
+      </p:sp>
+      <p:sp>
+        <p:nvSpPr>
+          <p:cNvPr id="9" name="TextBox 8"/>
           <p:cNvSpPr txBox="1"/>
           <p:nvPr/>
         </p:nvSpPr>
@@ -16667,7 +16278,7 @@
             <a:r>
               <a:rPr sz="2000" b="0">
                 <a:solidFill>
-                  <a:srgbClr val="C8A15A"/>
+                  <a:srgbClr val="F7E7C6"/>
                 </a:solidFill>
                 <a:latin typeface="Microsoft YaHei"/>
                 <a:ea typeface="Microsoft YaHei"/>
@@ -16676,242 +16287,6 @@
               <a:t>21</a:t>
             </a:r>
             <a:endParaRPr sz="2000"/>
-          </a:p>
-        </p:txBody>
-      </p:sp>
-      <p:sp>
-        <p:nvSpPr>
-          <p:cNvPr id="8" name="Rectangle 7"/>
-          <p:cNvSpPr/>
-          <p:nvPr/>
-        </p:nvSpPr>
-        <p:spPr>
-          <a:xfrm>
-            <a:off x="822960" y="1874519"/>
-            <a:ext cx="91440" cy="1325880"/>
-          </a:xfrm>
-          <a:prstGeom prst="rect">
-            <a:avLst/>
-          </a:prstGeom>
-          <a:solidFill>
-            <a:srgbClr val="9E1B1B"/>
-          </a:solidFill>
-          <a:ln>
-            <a:noFill/>
-          </a:ln>
-          <a:effectLst/>
-        </p:spPr>
-        <p:style>
-          <a:lnRef idx="1">
-            <a:schemeClr val="accent1"/>
-          </a:lnRef>
-          <a:fillRef idx="3">
-            <a:schemeClr val="accent1"/>
-          </a:fillRef>
-          <a:effectRef idx="2">
-            <a:schemeClr val="accent1"/>
-          </a:effectRef>
-          <a:fontRef idx="minor">
-            <a:schemeClr val="lt1"/>
-          </a:fontRef>
-        </p:style>
-        <p:txBody>
-          <a:bodyPr rtlCol="0" anchor="ctr"/>
-          <a:lstStyle/>
-          <a:p>
-            <a:pPr algn="ctr"/>
-          </a:p>
-        </p:txBody>
-      </p:sp>
-      <p:sp>
-        <p:nvSpPr>
-          <p:cNvPr id="9" name="TextBox 8"/>
-          <p:cNvSpPr txBox="1"/>
-          <p:nvPr/>
-        </p:nvSpPr>
-        <p:spPr>
-          <a:xfrm>
-            <a:off x="1188720" y="1874519"/>
-            <a:ext cx="10149840" cy="1325880"/>
-          </a:xfrm>
-          <a:prstGeom prst="rect">
-            <a:avLst/>
-          </a:prstGeom>
-          <a:noFill/>
-        </p:spPr>
-        <p:txBody>
-          <a:bodyPr wrap="square" anchor="ctr" lIns="36576" rIns="36576" tIns="36576" bIns="36576">
-            <a:noAutofit/>
-          </a:bodyPr>
-          <a:lstStyle/>
-          <a:p>
-            <a:pPr algn="l">
-              <a:lnSpc>
-                <a:spcPct val="125000"/>
-              </a:lnSpc>
-            </a:pPr>
-            <a:r>
-              <a:rPr sz="3000" b="0">
-                <a:solidFill>
-                  <a:srgbClr val="2B2B2B"/>
-                </a:solidFill>
-                <a:latin typeface="KaiTi"/>
-                <a:ea typeface="KaiTi"/>
-                <a:cs typeface="KaiTi"/>
-              </a:rPr>
-              <a:t>“这是一只多么小的船啊，要低头弯腰才能进入舱内，刚能容下十几个人促膝侧坐。”</a:t>
-            </a:r>
-            <a:endParaRPr sz="3000"/>
-          </a:p>
-        </p:txBody>
-      </p:sp>
-      <p:sp>
-        <p:nvSpPr>
-          <p:cNvPr id="10" name="Rectangle 9"/>
-          <p:cNvSpPr/>
-          <p:nvPr/>
-        </p:nvSpPr>
-        <p:spPr>
-          <a:xfrm>
-            <a:off x="822960" y="3474720"/>
-            <a:ext cx="91440" cy="1325880"/>
-          </a:xfrm>
-          <a:prstGeom prst="rect">
-            <a:avLst/>
-          </a:prstGeom>
-          <a:solidFill>
-            <a:srgbClr val="C8A15A"/>
-          </a:solidFill>
-          <a:ln>
-            <a:noFill/>
-          </a:ln>
-          <a:effectLst/>
-        </p:spPr>
-        <p:style>
-          <a:lnRef idx="1">
-            <a:schemeClr val="accent1"/>
-          </a:lnRef>
-          <a:fillRef idx="3">
-            <a:schemeClr val="accent1"/>
-          </a:fillRef>
-          <a:effectRef idx="2">
-            <a:schemeClr val="accent1"/>
-          </a:effectRef>
-          <a:fontRef idx="minor">
-            <a:schemeClr val="lt1"/>
-          </a:fontRef>
-        </p:style>
-        <p:txBody>
-          <a:bodyPr rtlCol="0" anchor="ctr"/>
-          <a:lstStyle/>
-          <a:p>
-            <a:pPr algn="ctr"/>
-          </a:p>
-        </p:txBody>
-      </p:sp>
-      <p:sp>
-        <p:nvSpPr>
-          <p:cNvPr id="11" name="TextBox 10"/>
-          <p:cNvSpPr txBox="1"/>
-          <p:nvPr/>
-        </p:nvSpPr>
-        <p:spPr>
-          <a:xfrm>
-            <a:off x="1188720" y="3474720"/>
-            <a:ext cx="10149840" cy="1325880"/>
-          </a:xfrm>
-          <a:prstGeom prst="rect">
-            <a:avLst/>
-          </a:prstGeom>
-          <a:noFill/>
-        </p:spPr>
-        <p:txBody>
-          <a:bodyPr wrap="square" anchor="ctr" lIns="36576" rIns="36576" tIns="36576" bIns="36576">
-            <a:noAutofit/>
-          </a:bodyPr>
-          <a:lstStyle/>
-          <a:p>
-            <a:pPr algn="l">
-              <a:lnSpc>
-                <a:spcPct val="125000"/>
-              </a:lnSpc>
-            </a:pPr>
-            <a:r>
-              <a:rPr sz="3000" b="0">
-                <a:solidFill>
-                  <a:srgbClr val="2B2B2B"/>
-                </a:solidFill>
-                <a:latin typeface="KaiTi"/>
-                <a:ea typeface="KaiTi"/>
-                <a:cs typeface="KaiTi"/>
-              </a:rPr>
-              <a:t>“我真不敢想，我们轰轰烈烈、排山倒海的八十年就是从这条船舱里倾泻出来的吗？”</a:t>
-            </a:r>
-            <a:endParaRPr sz="3000"/>
-          </a:p>
-        </p:txBody>
-      </p:sp>
-      <p:sp>
-        <p:nvSpPr>
-          <p:cNvPr id="12" name="TextBox 11"/>
-          <p:cNvSpPr txBox="1"/>
-          <p:nvPr/>
-        </p:nvSpPr>
-        <p:spPr>
-          <a:xfrm>
-            <a:off x="822960" y="5257800"/>
-            <a:ext cx="10515600" cy="777240"/>
-          </a:xfrm>
-          <a:prstGeom prst="rect">
-            <a:avLst/>
-          </a:prstGeom>
-          <a:noFill/>
-        </p:spPr>
-        <p:txBody>
-          <a:bodyPr wrap="square" anchor="ctr" lIns="36576" rIns="36576" tIns="36576" bIns="36576">
-            <a:noAutofit/>
-          </a:bodyPr>
-          <a:lstStyle/>
-          <a:p>
-            <a:pPr algn="ctr">
-              <a:lnSpc>
-                <a:spcPct val="120000"/>
-              </a:lnSpc>
-            </a:pPr>
-            <a:r>
-              <a:rPr sz="2600" b="0">
-                <a:solidFill>
-                  <a:srgbClr val="2B2B2B"/>
-                </a:solidFill>
-                <a:latin typeface="Microsoft YaHei"/>
-                <a:ea typeface="Microsoft YaHei"/>
-                <a:cs typeface="Microsoft YaHei"/>
-              </a:rPr>
-              <a:t>一只要低头弯腰才能进去的小船，</a:t>
-            </a:r>
-            <a:r>
-              <a:rPr sz="2600" b="1">
-                <a:solidFill>
-                  <a:srgbClr val="9E1B1B"/>
-                </a:solidFill>
-                <a:latin typeface="Microsoft YaHei"/>
-                <a:ea typeface="Microsoft YaHei"/>
-                <a:cs typeface="Microsoft YaHei"/>
-              </a:rPr>
-              <a:t>承载起一段轰轰烈烈的历史</a:t>
-            </a:r>
-            <a:r>
-              <a:rPr sz="2600" b="0">
-                <a:solidFill>
-                  <a:srgbClr val="2B2B2B"/>
-                </a:solidFill>
-                <a:latin typeface="Microsoft YaHei"/>
-                <a:ea typeface="Microsoft YaHei"/>
-                <a:cs typeface="Microsoft YaHei"/>
-              </a:rPr>
-              <a:t>。</a:t>
-            </a:r>
-            <a:endParaRPr sz="2600"/>
           </a:p>
         </p:txBody>
       </p:sp>
@@ -17038,7 +16413,7 @@
         <p:spPr>
           <a:xfrm>
             <a:off x="822960" y="384048"/>
-            <a:ext cx="8229600" cy="411480"/>
+            <a:ext cx="10607040" cy="411480"/>
           </a:xfrm>
           <a:prstGeom prst="rect">
             <a:avLst/>
@@ -17199,16 +16574,87 @@
           </a:p>
         </p:txBody>
       </p:sp>
-      <p:sp>
-        <p:nvSpPr>
-          <p:cNvPr id="8" name="Rounded Rectangle 7"/>
+      <p:pic>
+        <p:nvPicPr>
+          <p:cNvPr id="8" name="Picture 7" descr="image.jpg"/>
+          <p:cNvPicPr>
+            <a:picLocks noChangeAspect="1"/>
+          </p:cNvPicPr>
+          <p:nvPr/>
+        </p:nvPicPr>
+        <p:blipFill>
+          <a:blip r:embed="rId3"/>
+          <a:stretch>
+            <a:fillRect/>
+          </a:stretch>
+        </p:blipFill>
+        <p:spPr>
+          <a:xfrm>
+            <a:off x="822960" y="1828800"/>
+            <a:ext cx="2377440" cy="3246120"/>
+          </a:xfrm>
+          <a:prstGeom prst="rect">
+            <a:avLst/>
+          </a:prstGeom>
+          <a:ln w="31750">
+            <a:solidFill>
+              <a:srgbClr val="C8A15A"/>
+            </a:solidFill>
+          </a:ln>
+        </p:spPr>
+      </p:pic>
+      <p:sp>
+        <p:nvSpPr>
+          <p:cNvPr id="9" name="TextBox 8"/>
+          <p:cNvSpPr txBox="1"/>
+          <p:nvPr/>
+        </p:nvSpPr>
+        <p:spPr>
+          <a:xfrm>
+            <a:off x="822960" y="5120640"/>
+            <a:ext cx="2377440" cy="457200"/>
+          </a:xfrm>
+          <a:prstGeom prst="rect">
+            <a:avLst/>
+          </a:prstGeom>
+          <a:noFill/>
+        </p:spPr>
+        <p:txBody>
+          <a:bodyPr wrap="square" anchor="t" lIns="36576" rIns="36576" tIns="36576" bIns="36576">
+            <a:noAutofit/>
+          </a:bodyPr>
+          <a:lstStyle/>
+          <a:p>
+            <a:pPr algn="ctr">
+              <a:lnSpc>
+                <a:spcPct val="120000"/>
+              </a:lnSpc>
+            </a:pPr>
+            <a:r>
+              <a:rPr sz="2200" b="1">
+                <a:solidFill>
+                  <a:srgbClr val="7A1212"/>
+                </a:solidFill>
+                <a:latin typeface="Microsoft YaHei"/>
+                <a:ea typeface="Microsoft YaHei"/>
+                <a:cs typeface="Microsoft YaHei"/>
+              </a:rPr>
+              <a:t>王会悟</a:t>
+            </a:r>
+            <a:endParaRPr sz="2200"/>
+          </a:p>
+        </p:txBody>
+      </p:sp>
+      <p:sp>
+        <p:nvSpPr>
+          <p:cNvPr id="10" name="Rounded Rectangle 9"/>
           <p:cNvSpPr/>
           <p:nvPr/>
         </p:nvSpPr>
         <p:spPr>
           <a:xfrm>
-            <a:off x="822960" y="1920240"/>
-            <a:ext cx="2423160" cy="2651760"/>
+            <a:off x="3520440" y="1828800"/>
+            <a:ext cx="3794760" cy="1417320"/>
           </a:xfrm>
           <a:prstGeom prst="roundRect">
             <a:avLst>
@@ -17247,14 +16693,14 @@
       </p:sp>
       <p:sp>
         <p:nvSpPr>
-          <p:cNvPr id="9" name="Oval 8"/>
+          <p:cNvPr id="11" name="Oval 10"/>
           <p:cNvSpPr/>
           <p:nvPr/>
         </p:nvSpPr>
         <p:spPr>
           <a:xfrm>
-            <a:off x="1709928" y="2103120"/>
-            <a:ext cx="640080" cy="640080"/>
+            <a:off x="3703320" y="2011680"/>
+            <a:ext cx="502920" cy="502920"/>
           </a:xfrm>
           <a:prstGeom prst="ellipse">
             <a:avLst/>
@@ -17291,14 +16737,14 @@
       </p:sp>
       <p:sp>
         <p:nvSpPr>
-          <p:cNvPr id="10" name="TextBox 9"/>
+          <p:cNvPr id="12" name="TextBox 11"/>
           <p:cNvSpPr txBox="1"/>
           <p:nvPr/>
         </p:nvSpPr>
         <p:spPr>
           <a:xfrm>
-            <a:off x="1709928" y="2103120"/>
-            <a:ext cx="640080" cy="640080"/>
+            <a:off x="3703320" y="2011680"/>
+            <a:ext cx="502920" cy="502920"/>
           </a:xfrm>
           <a:prstGeom prst="rect">
             <a:avLst/>
@@ -17317,15 +16763,57 @@
               </a:lnSpc>
             </a:pPr>
             <a:r>
+              <a:rPr sz="2200" b="1">
+                <a:solidFill>
+                  <a:srgbClr val="FFFFFF"/>
+                </a:solidFill>
+                <a:latin typeface="Microsoft YaHei"/>
+                <a:ea typeface="Microsoft YaHei"/>
+                <a:cs typeface="Microsoft YaHei"/>
+              </a:rPr>
+              <a:t>1</a:t>
+            </a:r>
+            <a:endParaRPr sz="2200"/>
+          </a:p>
+        </p:txBody>
+      </p:sp>
+      <p:sp>
+        <p:nvSpPr>
+          <p:cNvPr id="13" name="TextBox 12"/>
+          <p:cNvSpPr txBox="1"/>
+          <p:nvPr/>
+        </p:nvSpPr>
+        <p:spPr>
+          <a:xfrm>
+            <a:off x="4343400" y="1965960"/>
+            <a:ext cx="2834640" cy="548640"/>
+          </a:xfrm>
+          <a:prstGeom prst="rect">
+            <a:avLst/>
+          </a:prstGeom>
+          <a:noFill/>
+        </p:spPr>
+        <p:txBody>
+          <a:bodyPr wrap="square" anchor="ctr" lIns="36576" rIns="36576" tIns="36576" bIns="36576">
+            <a:noAutofit/>
+          </a:bodyPr>
+          <a:lstStyle/>
+          <a:p>
+            <a:pPr algn="l">
+              <a:lnSpc>
+                <a:spcPct val="120000"/>
+              </a:lnSpc>
+            </a:pPr>
+            <a:r>
               <a:rPr sz="2400" b="1">
                 <a:solidFill>
-                  <a:srgbClr val="FFFFFF"/>
-                </a:solidFill>
-                <a:latin typeface="Microsoft YaHei"/>
-                <a:ea typeface="Microsoft YaHei"/>
-                <a:cs typeface="Microsoft YaHei"/>
-              </a:rPr>
-              <a:t>1</a:t>
+                  <a:srgbClr val="9E1B1B"/>
+                </a:solidFill>
+                <a:latin typeface="Microsoft YaHei"/>
+                <a:ea typeface="Microsoft YaHei"/>
+                <a:cs typeface="Microsoft YaHei"/>
+              </a:rPr>
+              <a:t>她是谁</a:t>
             </a:r>
             <a:endParaRPr sz="2400"/>
           </a:p>
@@ -17333,14 +16821,14 @@
       </p:sp>
       <p:sp>
         <p:nvSpPr>
-          <p:cNvPr id="11" name="TextBox 10"/>
+          <p:cNvPr id="14" name="TextBox 13"/>
           <p:cNvSpPr txBox="1"/>
           <p:nvPr/>
         </p:nvSpPr>
         <p:spPr>
           <a:xfrm>
-            <a:off x="822960" y="2834640"/>
-            <a:ext cx="2423160" cy="548640"/>
+            <a:off x="4343400" y="2514600"/>
+            <a:ext cx="2880360" cy="685800"/>
           </a:xfrm>
           <a:prstGeom prst="rect">
             <a:avLst/>
@@ -17353,51 +16841,9 @@
           </a:bodyPr>
           <a:lstStyle/>
           <a:p>
-            <a:pPr algn="ctr">
-              <a:lnSpc>
-                <a:spcPct val="120000"/>
-              </a:lnSpc>
-            </a:pPr>
-            <a:r>
-              <a:rPr sz="2600" b="1">
-                <a:solidFill>
-                  <a:srgbClr val="9E1B1B"/>
-                </a:solidFill>
-                <a:latin typeface="Microsoft YaHei"/>
-                <a:ea typeface="Microsoft YaHei"/>
-                <a:cs typeface="Microsoft YaHei"/>
-              </a:rPr>
-              <a:t>她是谁</a:t>
-            </a:r>
-            <a:endParaRPr sz="2600"/>
-          </a:p>
-        </p:txBody>
-      </p:sp>
-      <p:sp>
-        <p:nvSpPr>
-          <p:cNvPr id="12" name="TextBox 11"/>
-          <p:cNvSpPr txBox="1"/>
-          <p:nvPr/>
-        </p:nvSpPr>
-        <p:spPr>
-          <a:xfrm>
-            <a:off x="822960" y="3474720"/>
-            <a:ext cx="2423160" cy="1005840"/>
-          </a:xfrm>
-          <a:prstGeom prst="rect">
-            <a:avLst/>
-          </a:prstGeom>
-          <a:noFill/>
-        </p:spPr>
-        <p:txBody>
-          <a:bodyPr wrap="square" anchor="t" lIns="36576" rIns="36576" tIns="36576" bIns="36576">
-            <a:noAutofit/>
-          </a:bodyPr>
-          <a:lstStyle/>
-          <a:p>
-            <a:pPr algn="ctr">
-              <a:lnSpc>
-                <a:spcPct val="115000"/>
+            <a:pPr algn="l">
+              <a:lnSpc>
+                <a:spcPct val="100000"/>
               </a:lnSpc>
             </a:pPr>
             <a:r>
@@ -17409,41 +16855,22 @@
                 <a:ea typeface="Microsoft YaHei"/>
                 <a:cs typeface="Microsoft YaHei"/>
               </a:rPr>
-              <a:t>李达的夫人</a:t>
+              <a:t>李达的夫人，嘉兴人</a:t>
             </a:r>
             <a:endParaRPr sz="2200"/>
           </a:p>
-          <a:p>
-            <a:pPr algn="ctr">
-              <a:lnSpc>
-                <a:spcPct val="115000"/>
-              </a:lnSpc>
-            </a:pPr>
-            <a:r>
-              <a:rPr sz="2200" b="0">
-                <a:solidFill>
-                  <a:srgbClr val="2B2B2B"/>
-                </a:solidFill>
-                <a:latin typeface="Microsoft YaHei"/>
-                <a:ea typeface="Microsoft YaHei"/>
-                <a:cs typeface="Microsoft YaHei"/>
-              </a:rPr>
-              <a:t>嘉兴人</a:t>
-            </a:r>
-            <a:endParaRPr sz="2200"/>
-          </a:p>
-        </p:txBody>
-      </p:sp>
-      <p:sp>
-        <p:nvSpPr>
-          <p:cNvPr id="13" name="Rounded Rectangle 12"/>
+        </p:txBody>
+      </p:sp>
+      <p:sp>
+        <p:nvSpPr>
+          <p:cNvPr id="15" name="Rounded Rectangle 14"/>
           <p:cNvSpPr/>
           <p:nvPr/>
         </p:nvSpPr>
         <p:spPr>
           <a:xfrm>
-            <a:off x="3520440" y="1920240"/>
-            <a:ext cx="2423160" cy="2651760"/>
+            <a:off x="7498079" y="1828800"/>
+            <a:ext cx="3794760" cy="1417320"/>
           </a:xfrm>
           <a:prstGeom prst="roundRect">
             <a:avLst>
@@ -17482,14 +16909,14 @@
       </p:sp>
       <p:sp>
         <p:nvSpPr>
-          <p:cNvPr id="14" name="Oval 13"/>
+          <p:cNvPr id="16" name="Oval 15"/>
           <p:cNvSpPr/>
           <p:nvPr/>
         </p:nvSpPr>
         <p:spPr>
           <a:xfrm>
-            <a:off x="4407408" y="2103120"/>
-            <a:ext cx="640080" cy="640080"/>
+            <a:off x="7680959" y="2011680"/>
+            <a:ext cx="502920" cy="502920"/>
           </a:xfrm>
           <a:prstGeom prst="ellipse">
             <a:avLst/>
@@ -17526,14 +16953,14 @@
       </p:sp>
       <p:sp>
         <p:nvSpPr>
-          <p:cNvPr id="15" name="TextBox 14"/>
+          <p:cNvPr id="17" name="TextBox 16"/>
           <p:cNvSpPr txBox="1"/>
           <p:nvPr/>
         </p:nvSpPr>
         <p:spPr>
           <a:xfrm>
-            <a:off x="4407408" y="2103120"/>
-            <a:ext cx="640080" cy="640080"/>
+            <a:off x="7680959" y="2011680"/>
+            <a:ext cx="502920" cy="502920"/>
           </a:xfrm>
           <a:prstGeom prst="rect">
             <a:avLst/>
@@ -17552,15 +16979,57 @@
               </a:lnSpc>
             </a:pPr>
             <a:r>
+              <a:rPr sz="2200" b="1">
+                <a:solidFill>
+                  <a:srgbClr val="FFFFFF"/>
+                </a:solidFill>
+                <a:latin typeface="Microsoft YaHei"/>
+                <a:ea typeface="Microsoft YaHei"/>
+                <a:cs typeface="Microsoft YaHei"/>
+              </a:rPr>
+              <a:t>2</a:t>
+            </a:r>
+            <a:endParaRPr sz="2200"/>
+          </a:p>
+        </p:txBody>
+      </p:sp>
+      <p:sp>
+        <p:nvSpPr>
+          <p:cNvPr id="18" name="TextBox 17"/>
+          <p:cNvSpPr txBox="1"/>
+          <p:nvPr/>
+        </p:nvSpPr>
+        <p:spPr>
+          <a:xfrm>
+            <a:off x="8321040" y="1965960"/>
+            <a:ext cx="2834640" cy="548640"/>
+          </a:xfrm>
+          <a:prstGeom prst="rect">
+            <a:avLst/>
+          </a:prstGeom>
+          <a:noFill/>
+        </p:spPr>
+        <p:txBody>
+          <a:bodyPr wrap="square" anchor="ctr" lIns="36576" rIns="36576" tIns="36576" bIns="36576">
+            <a:noAutofit/>
+          </a:bodyPr>
+          <a:lstStyle/>
+          <a:p>
+            <a:pPr algn="l">
+              <a:lnSpc>
+                <a:spcPct val="120000"/>
+              </a:lnSpc>
+            </a:pPr>
+            <a:r>
               <a:rPr sz="2400" b="1">
                 <a:solidFill>
-                  <a:srgbClr val="FFFFFF"/>
-                </a:solidFill>
-                <a:latin typeface="Microsoft YaHei"/>
-                <a:ea typeface="Microsoft YaHei"/>
-                <a:cs typeface="Microsoft YaHei"/>
-              </a:rPr>
-              <a:t>2</a:t>
+                  <a:srgbClr val="9E1B1B"/>
+                </a:solidFill>
+                <a:latin typeface="Microsoft YaHei"/>
+                <a:ea typeface="Microsoft YaHei"/>
+                <a:cs typeface="Microsoft YaHei"/>
+              </a:rPr>
+              <a:t>她提议</a:t>
             </a:r>
             <a:endParaRPr sz="2400"/>
           </a:p>
@@ -17568,14 +17037,14 @@
       </p:sp>
       <p:sp>
         <p:nvSpPr>
-          <p:cNvPr id="16" name="TextBox 15"/>
+          <p:cNvPr id="19" name="TextBox 18"/>
           <p:cNvSpPr txBox="1"/>
           <p:nvPr/>
         </p:nvSpPr>
         <p:spPr>
           <a:xfrm>
-            <a:off x="3520440" y="2834640"/>
-            <a:ext cx="2423160" cy="548640"/>
+            <a:off x="8321040" y="2514600"/>
+            <a:ext cx="2880360" cy="685800"/>
           </a:xfrm>
           <a:prstGeom prst="rect">
             <a:avLst/>
@@ -17588,51 +17057,9 @@
           </a:bodyPr>
           <a:lstStyle/>
           <a:p>
-            <a:pPr algn="ctr">
-              <a:lnSpc>
-                <a:spcPct val="120000"/>
-              </a:lnSpc>
-            </a:pPr>
-            <a:r>
-              <a:rPr sz="2600" b="1">
-                <a:solidFill>
-                  <a:srgbClr val="9E1B1B"/>
-                </a:solidFill>
-                <a:latin typeface="Microsoft YaHei"/>
-                <a:ea typeface="Microsoft YaHei"/>
-                <a:cs typeface="Microsoft YaHei"/>
-              </a:rPr>
-              <a:t>她提议</a:t>
-            </a:r>
-            <a:endParaRPr sz="2600"/>
-          </a:p>
-        </p:txBody>
-      </p:sp>
-      <p:sp>
-        <p:nvSpPr>
-          <p:cNvPr id="17" name="TextBox 16"/>
-          <p:cNvSpPr txBox="1"/>
-          <p:nvPr/>
-        </p:nvSpPr>
-        <p:spPr>
-          <a:xfrm>
-            <a:off x="3520440" y="3474720"/>
-            <a:ext cx="2423160" cy="1005840"/>
-          </a:xfrm>
-          <a:prstGeom prst="rect">
-            <a:avLst/>
-          </a:prstGeom>
-          <a:noFill/>
-        </p:spPr>
-        <p:txBody>
-          <a:bodyPr wrap="square" anchor="t" lIns="36576" rIns="36576" tIns="36576" bIns="36576">
-            <a:noAutofit/>
-          </a:bodyPr>
-          <a:lstStyle/>
-          <a:p>
-            <a:pPr algn="ctr">
-              <a:lnSpc>
-                <a:spcPct val="115000"/>
+            <a:pPr algn="l">
+              <a:lnSpc>
+                <a:spcPct val="100000"/>
               </a:lnSpc>
             </a:pPr>
             <a:r>
@@ -17644,41 +17071,22 @@
                 <a:ea typeface="Microsoft YaHei"/>
                 <a:cs typeface="Microsoft YaHei"/>
               </a:rPr>
-              <a:t>把会议转移到</a:t>
+              <a:t>把会议转移到嘉兴南湖</a:t>
             </a:r>
             <a:endParaRPr sz="2200"/>
           </a:p>
-          <a:p>
-            <a:pPr algn="ctr">
-              <a:lnSpc>
-                <a:spcPct val="115000"/>
-              </a:lnSpc>
-            </a:pPr>
-            <a:r>
-              <a:rPr sz="2200" b="0">
-                <a:solidFill>
-                  <a:srgbClr val="2B2B2B"/>
-                </a:solidFill>
-                <a:latin typeface="Microsoft YaHei"/>
-                <a:ea typeface="Microsoft YaHei"/>
-                <a:cs typeface="Microsoft YaHei"/>
-              </a:rPr>
-              <a:t>嘉兴南湖</a:t>
-            </a:r>
-            <a:endParaRPr sz="2200"/>
-          </a:p>
-        </p:txBody>
-      </p:sp>
-      <p:sp>
-        <p:nvSpPr>
-          <p:cNvPr id="18" name="Rounded Rectangle 17"/>
+        </p:txBody>
+      </p:sp>
+      <p:sp>
+        <p:nvSpPr>
+          <p:cNvPr id="20" name="Rounded Rectangle 19"/>
           <p:cNvSpPr/>
           <p:nvPr/>
         </p:nvSpPr>
         <p:spPr>
           <a:xfrm>
-            <a:off x="6217920" y="1920240"/>
-            <a:ext cx="2423160" cy="2651760"/>
+            <a:off x="3520440" y="3429000"/>
+            <a:ext cx="3794760" cy="1417320"/>
           </a:xfrm>
           <a:prstGeom prst="roundRect">
             <a:avLst>
@@ -17717,14 +17125,14 @@
       </p:sp>
       <p:sp>
         <p:nvSpPr>
-          <p:cNvPr id="19" name="Oval 18"/>
+          <p:cNvPr id="21" name="Oval 20"/>
           <p:cNvSpPr/>
           <p:nvPr/>
         </p:nvSpPr>
         <p:spPr>
           <a:xfrm>
-            <a:off x="7104888" y="2103120"/>
-            <a:ext cx="640080" cy="640080"/>
+            <a:off x="3703320" y="3611880"/>
+            <a:ext cx="502920" cy="502920"/>
           </a:xfrm>
           <a:prstGeom prst="ellipse">
             <a:avLst/>
@@ -17761,14 +17169,14 @@
       </p:sp>
       <p:sp>
         <p:nvSpPr>
-          <p:cNvPr id="20" name="TextBox 19"/>
+          <p:cNvPr id="22" name="TextBox 21"/>
           <p:cNvSpPr txBox="1"/>
           <p:nvPr/>
         </p:nvSpPr>
         <p:spPr>
           <a:xfrm>
-            <a:off x="7104888" y="2103120"/>
-            <a:ext cx="640080" cy="640080"/>
+            <a:off x="3703320" y="3611880"/>
+            <a:ext cx="502920" cy="502920"/>
           </a:xfrm>
           <a:prstGeom prst="rect">
             <a:avLst/>
@@ -17787,15 +17195,57 @@
               </a:lnSpc>
             </a:pPr>
             <a:r>
+              <a:rPr sz="2200" b="1">
+                <a:solidFill>
+                  <a:srgbClr val="FFFFFF"/>
+                </a:solidFill>
+                <a:latin typeface="Microsoft YaHei"/>
+                <a:ea typeface="Microsoft YaHei"/>
+                <a:cs typeface="Microsoft YaHei"/>
+              </a:rPr>
+              <a:t>3</a:t>
+            </a:r>
+            <a:endParaRPr sz="2200"/>
+          </a:p>
+        </p:txBody>
+      </p:sp>
+      <p:sp>
+        <p:nvSpPr>
+          <p:cNvPr id="23" name="TextBox 22"/>
+          <p:cNvSpPr txBox="1"/>
+          <p:nvPr/>
+        </p:nvSpPr>
+        <p:spPr>
+          <a:xfrm>
+            <a:off x="4343400" y="3566160"/>
+            <a:ext cx="2834640" cy="548640"/>
+          </a:xfrm>
+          <a:prstGeom prst="rect">
+            <a:avLst/>
+          </a:prstGeom>
+          <a:noFill/>
+        </p:spPr>
+        <p:txBody>
+          <a:bodyPr wrap="square" anchor="ctr" lIns="36576" rIns="36576" tIns="36576" bIns="36576">
+            <a:noAutofit/>
+          </a:bodyPr>
+          <a:lstStyle/>
+          <a:p>
+            <a:pPr algn="l">
+              <a:lnSpc>
+                <a:spcPct val="120000"/>
+              </a:lnSpc>
+            </a:pPr>
+            <a:r>
               <a:rPr sz="2400" b="1">
                 <a:solidFill>
-                  <a:srgbClr val="FFFFFF"/>
-                </a:solidFill>
-                <a:latin typeface="Microsoft YaHei"/>
-                <a:ea typeface="Microsoft YaHei"/>
-                <a:cs typeface="Microsoft YaHei"/>
-              </a:rPr>
-              <a:t>3</a:t>
+                  <a:srgbClr val="9E1B1B"/>
+                </a:solidFill>
+                <a:latin typeface="Microsoft YaHei"/>
+                <a:ea typeface="Microsoft YaHei"/>
+                <a:cs typeface="Microsoft YaHei"/>
+              </a:rPr>
+              <a:t>她放哨</a:t>
             </a:r>
             <a:endParaRPr sz="2400"/>
           </a:p>
@@ -17803,14 +17253,14 @@
       </p:sp>
       <p:sp>
         <p:nvSpPr>
-          <p:cNvPr id="21" name="TextBox 20"/>
+          <p:cNvPr id="24" name="TextBox 23"/>
           <p:cNvSpPr txBox="1"/>
           <p:nvPr/>
         </p:nvSpPr>
         <p:spPr>
           <a:xfrm>
-            <a:off x="6217920" y="2834640"/>
-            <a:ext cx="2423160" cy="548640"/>
+            <a:off x="4343400" y="4114800"/>
+            <a:ext cx="2880360" cy="685800"/>
           </a:xfrm>
           <a:prstGeom prst="rect">
             <a:avLst/>
@@ -17823,51 +17273,9 @@
           </a:bodyPr>
           <a:lstStyle/>
           <a:p>
-            <a:pPr algn="ctr">
-              <a:lnSpc>
-                <a:spcPct val="120000"/>
-              </a:lnSpc>
-            </a:pPr>
-            <a:r>
-              <a:rPr sz="2600" b="1">
-                <a:solidFill>
-                  <a:srgbClr val="9E1B1B"/>
-                </a:solidFill>
-                <a:latin typeface="Microsoft YaHei"/>
-                <a:ea typeface="Microsoft YaHei"/>
-                <a:cs typeface="Microsoft YaHei"/>
-              </a:rPr>
-              <a:t>她放哨</a:t>
-            </a:r>
-            <a:endParaRPr sz="2600"/>
-          </a:p>
-        </p:txBody>
-      </p:sp>
-      <p:sp>
-        <p:nvSpPr>
-          <p:cNvPr id="22" name="TextBox 21"/>
-          <p:cNvSpPr txBox="1"/>
-          <p:nvPr/>
-        </p:nvSpPr>
-        <p:spPr>
-          <a:xfrm>
-            <a:off x="6217920" y="3474720"/>
-            <a:ext cx="2423160" cy="1005840"/>
-          </a:xfrm>
-          <a:prstGeom prst="rect">
-            <a:avLst/>
-          </a:prstGeom>
-          <a:noFill/>
-        </p:spPr>
-        <p:txBody>
-          <a:bodyPr wrap="square" anchor="t" lIns="36576" rIns="36576" tIns="36576" bIns="36576">
-            <a:noAutofit/>
-          </a:bodyPr>
-          <a:lstStyle/>
-          <a:p>
-            <a:pPr algn="ctr">
-              <a:lnSpc>
-                <a:spcPct val="115000"/>
+            <a:pPr algn="l">
+              <a:lnSpc>
+                <a:spcPct val="100000"/>
               </a:lnSpc>
             </a:pPr>
             <a:r>
@@ -17884,9 +17292,9 @@
             <a:endParaRPr sz="2200"/>
           </a:p>
           <a:p>
-            <a:pPr algn="ctr">
-              <a:lnSpc>
-                <a:spcPct val="115000"/>
+            <a:pPr algn="l">
+              <a:lnSpc>
+                <a:spcPct val="100000"/>
               </a:lnSpc>
             </a:pPr>
             <a:r>
@@ -17906,14 +17314,14 @@
       </p:sp>
       <p:sp>
         <p:nvSpPr>
-          <p:cNvPr id="23" name="Rounded Rectangle 22"/>
+          <p:cNvPr id="25" name="Rounded Rectangle 24"/>
           <p:cNvSpPr/>
           <p:nvPr/>
         </p:nvSpPr>
         <p:spPr>
           <a:xfrm>
-            <a:off x="8915400" y="1920240"/>
-            <a:ext cx="2423160" cy="2651760"/>
+            <a:off x="7498079" y="3429000"/>
+            <a:ext cx="3794760" cy="1417320"/>
           </a:xfrm>
           <a:prstGeom prst="roundRect">
             <a:avLst>
@@ -17952,14 +17360,14 @@
       </p:sp>
       <p:sp>
         <p:nvSpPr>
-          <p:cNvPr id="24" name="Oval 23"/>
+          <p:cNvPr id="26" name="Oval 25"/>
           <p:cNvSpPr/>
           <p:nvPr/>
         </p:nvSpPr>
         <p:spPr>
           <a:xfrm>
-            <a:off x="9802368" y="2103120"/>
-            <a:ext cx="640080" cy="640080"/>
+            <a:off x="7680959" y="3611880"/>
+            <a:ext cx="502920" cy="502920"/>
           </a:xfrm>
           <a:prstGeom prst="ellipse">
             <a:avLst/>
@@ -17996,14 +17404,14 @@
       </p:sp>
       <p:sp>
         <p:nvSpPr>
-          <p:cNvPr id="25" name="TextBox 24"/>
+          <p:cNvPr id="27" name="TextBox 26"/>
           <p:cNvSpPr txBox="1"/>
           <p:nvPr/>
         </p:nvSpPr>
         <p:spPr>
           <a:xfrm>
-            <a:off x="9802368" y="2103120"/>
-            <a:ext cx="640080" cy="640080"/>
+            <a:off x="7680959" y="3611880"/>
+            <a:ext cx="502920" cy="502920"/>
           </a:xfrm>
           <a:prstGeom prst="rect">
             <a:avLst/>
@@ -18022,15 +17430,57 @@
               </a:lnSpc>
             </a:pPr>
             <a:r>
+              <a:rPr sz="2200" b="1">
+                <a:solidFill>
+                  <a:srgbClr val="FFFFFF"/>
+                </a:solidFill>
+                <a:latin typeface="Microsoft YaHei"/>
+                <a:ea typeface="Microsoft YaHei"/>
+                <a:cs typeface="Microsoft YaHei"/>
+              </a:rPr>
+              <a:t>4</a:t>
+            </a:r>
+            <a:endParaRPr sz="2200"/>
+          </a:p>
+        </p:txBody>
+      </p:sp>
+      <p:sp>
+        <p:nvSpPr>
+          <p:cNvPr id="28" name="TextBox 27"/>
+          <p:cNvSpPr txBox="1"/>
+          <p:nvPr/>
+        </p:nvSpPr>
+        <p:spPr>
+          <a:xfrm>
+            <a:off x="8321040" y="3566160"/>
+            <a:ext cx="2834640" cy="548640"/>
+          </a:xfrm>
+          <a:prstGeom prst="rect">
+            <a:avLst/>
+          </a:prstGeom>
+          <a:noFill/>
+        </p:spPr>
+        <p:txBody>
+          <a:bodyPr wrap="square" anchor="ctr" lIns="36576" rIns="36576" tIns="36576" bIns="36576">
+            <a:noAutofit/>
+          </a:bodyPr>
+          <a:lstStyle/>
+          <a:p>
+            <a:pPr algn="l">
+              <a:lnSpc>
+                <a:spcPct val="120000"/>
+              </a:lnSpc>
+            </a:pPr>
+            <a:r>
               <a:rPr sz="2400" b="1">
                 <a:solidFill>
-                  <a:srgbClr val="FFFFFF"/>
-                </a:solidFill>
-                <a:latin typeface="Microsoft YaHei"/>
-                <a:ea typeface="Microsoft YaHei"/>
-                <a:cs typeface="Microsoft YaHei"/>
-              </a:rPr>
-              <a:t>4</a:t>
+                  <a:srgbClr val="9E1B1B"/>
+                </a:solidFill>
+                <a:latin typeface="Microsoft YaHei"/>
+                <a:ea typeface="Microsoft YaHei"/>
+                <a:cs typeface="Microsoft YaHei"/>
+              </a:rPr>
+              <a:t>她发暗号</a:t>
             </a:r>
             <a:endParaRPr sz="2400"/>
           </a:p>
@@ -18038,14 +17488,14 @@
       </p:sp>
       <p:sp>
         <p:nvSpPr>
-          <p:cNvPr id="26" name="TextBox 25"/>
+          <p:cNvPr id="29" name="TextBox 28"/>
           <p:cNvSpPr txBox="1"/>
           <p:nvPr/>
         </p:nvSpPr>
         <p:spPr>
           <a:xfrm>
-            <a:off x="8915400" y="2834640"/>
-            <a:ext cx="2423160" cy="548640"/>
+            <a:off x="8321040" y="4114800"/>
+            <a:ext cx="2880360" cy="685800"/>
           </a:xfrm>
           <a:prstGeom prst="rect">
             <a:avLst/>
@@ -18058,97 +17508,55 @@
           </a:bodyPr>
           <a:lstStyle/>
           <a:p>
-            <a:pPr algn="ctr">
-              <a:lnSpc>
-                <a:spcPct val="120000"/>
-              </a:lnSpc>
-            </a:pPr>
-            <a:r>
-              <a:rPr sz="2600" b="1">
-                <a:solidFill>
-                  <a:srgbClr val="9E1B1B"/>
-                </a:solidFill>
-                <a:latin typeface="Microsoft YaHei"/>
-                <a:ea typeface="Microsoft YaHei"/>
-                <a:cs typeface="Microsoft YaHei"/>
-              </a:rPr>
-              <a:t>她发暗号</a:t>
-            </a:r>
-            <a:endParaRPr sz="2600"/>
-          </a:p>
-        </p:txBody>
-      </p:sp>
-      <p:sp>
-        <p:nvSpPr>
-          <p:cNvPr id="27" name="TextBox 26"/>
+            <a:pPr algn="l">
+              <a:lnSpc>
+                <a:spcPct val="100000"/>
+              </a:lnSpc>
+            </a:pPr>
+            <a:r>
+              <a:rPr sz="2200" b="0">
+                <a:solidFill>
+                  <a:srgbClr val="2B2B2B"/>
+                </a:solidFill>
+                <a:latin typeface="Microsoft YaHei"/>
+                <a:ea typeface="Microsoft YaHei"/>
+                <a:cs typeface="Microsoft YaHei"/>
+              </a:rPr>
+              <a:t>汽艇驶过</a:t>
+            </a:r>
+            <a:endParaRPr sz="2200"/>
+          </a:p>
+          <a:p>
+            <a:pPr algn="l">
+              <a:lnSpc>
+                <a:spcPct val="100000"/>
+              </a:lnSpc>
+            </a:pPr>
+            <a:r>
+              <a:rPr sz="2200" b="0">
+                <a:solidFill>
+                  <a:srgbClr val="2B2B2B"/>
+                </a:solidFill>
+                <a:latin typeface="Microsoft YaHei"/>
+                <a:ea typeface="Microsoft YaHei"/>
+                <a:cs typeface="Microsoft YaHei"/>
+              </a:rPr>
+              <a:t>舱内响起麻将声</a:t>
+            </a:r>
+            <a:endParaRPr sz="2200"/>
+          </a:p>
+        </p:txBody>
+      </p:sp>
+      <p:sp>
+        <p:nvSpPr>
+          <p:cNvPr id="30" name="TextBox 29"/>
           <p:cNvSpPr txBox="1"/>
           <p:nvPr/>
         </p:nvSpPr>
         <p:spPr>
           <a:xfrm>
-            <a:off x="8915400" y="3474720"/>
-            <a:ext cx="2423160" cy="1005840"/>
-          </a:xfrm>
-          <a:prstGeom prst="rect">
-            <a:avLst/>
-          </a:prstGeom>
-          <a:noFill/>
-        </p:spPr>
-        <p:txBody>
-          <a:bodyPr wrap="square" anchor="t" lIns="36576" rIns="36576" tIns="36576" bIns="36576">
-            <a:noAutofit/>
-          </a:bodyPr>
-          <a:lstStyle/>
-          <a:p>
-            <a:pPr algn="ctr">
-              <a:lnSpc>
-                <a:spcPct val="115000"/>
-              </a:lnSpc>
-            </a:pPr>
-            <a:r>
-              <a:rPr sz="2200" b="0">
-                <a:solidFill>
-                  <a:srgbClr val="2B2B2B"/>
-                </a:solidFill>
-                <a:latin typeface="Microsoft YaHei"/>
-                <a:ea typeface="Microsoft YaHei"/>
-                <a:cs typeface="Microsoft YaHei"/>
-              </a:rPr>
-              <a:t>汽艇驶过</a:t>
-            </a:r>
-            <a:endParaRPr sz="2200"/>
-          </a:p>
-          <a:p>
-            <a:pPr algn="ctr">
-              <a:lnSpc>
-                <a:spcPct val="115000"/>
-              </a:lnSpc>
-            </a:pPr>
-            <a:r>
-              <a:rPr sz="2200" b="0">
-                <a:solidFill>
-                  <a:srgbClr val="2B2B2B"/>
-                </a:solidFill>
-                <a:latin typeface="Microsoft YaHei"/>
-                <a:ea typeface="Microsoft YaHei"/>
-                <a:cs typeface="Microsoft YaHei"/>
-              </a:rPr>
-              <a:t>舱内响起麻将声</a:t>
-            </a:r>
-            <a:endParaRPr sz="2200"/>
-          </a:p>
-        </p:txBody>
-      </p:sp>
-      <p:sp>
-        <p:nvSpPr>
-          <p:cNvPr id="28" name="TextBox 27"/>
-          <p:cNvSpPr txBox="1"/>
-          <p:nvPr/>
-        </p:nvSpPr>
-        <p:spPr>
-          <a:xfrm>
-            <a:off x="822960" y="4937760"/>
-            <a:ext cx="10515600" cy="822960"/>
+            <a:off x="3520440" y="5120640"/>
+            <a:ext cx="7818120" cy="731520"/>
           </a:xfrm>
           <a:prstGeom prst="rect">
             <a:avLst/>
@@ -18326,7 +17734,7 @@
         <p:spPr>
           <a:xfrm>
             <a:off x="822960" y="384048"/>
-            <a:ext cx="8229600" cy="411480"/>
+            <a:ext cx="10607040" cy="411480"/>
           </a:xfrm>
           <a:prstGeom prst="rect">
             <a:avLst/>
@@ -19238,7 +18646,7 @@
         <p:spPr>
           <a:xfrm>
             <a:off x="822960" y="384048"/>
-            <a:ext cx="8229600" cy="411480"/>
+            <a:ext cx="10607040" cy="411480"/>
           </a:xfrm>
           <a:prstGeom prst="rect">
             <a:avLst/>
@@ -19779,7 +19187,7 @@
         <p:spPr>
           <a:xfrm>
             <a:off x="822960" y="384048"/>
-            <a:ext cx="8229600" cy="411480"/>
+            <a:ext cx="10607040" cy="411480"/>
           </a:xfrm>
           <a:prstGeom prst="rect">
             <a:avLst/>
@@ -20545,7 +19953,7 @@
         <p:spPr>
           <a:xfrm>
             <a:off x="822960" y="384048"/>
-            <a:ext cx="8229600" cy="411480"/>
+            <a:ext cx="10607040" cy="411480"/>
           </a:xfrm>
           <a:prstGeom prst="rect">
             <a:avLst/>
@@ -21396,7 +20804,7 @@
         <p:spPr>
           <a:xfrm>
             <a:off x="822960" y="384048"/>
-            <a:ext cx="8229600" cy="411480"/>
+            <a:ext cx="10607040" cy="411480"/>
           </a:xfrm>
           <a:prstGeom prst="rect">
             <a:avLst/>
@@ -23689,16 +23097,45 @@
           </a:p>
         </p:txBody>
       </p:sp>
-      <p:sp>
-        <p:nvSpPr>
-          <p:cNvPr id="8" name="Rectangle 7"/>
+      <p:pic>
+        <p:nvPicPr>
+          <p:cNvPr id="8" name="Picture 7" descr="image.jpg"/>
+          <p:cNvPicPr>
+            <a:picLocks noChangeAspect="1"/>
+          </p:cNvPicPr>
+          <p:nvPr/>
+        </p:nvPicPr>
+        <p:blipFill>
+          <a:blip r:embed="rId3"/>
+          <a:stretch>
+            <a:fillRect/>
+          </a:stretch>
+        </p:blipFill>
+        <p:spPr>
+          <a:xfrm>
+            <a:off x="822960" y="2926080"/>
+            <a:ext cx="3291840" cy="1828800"/>
+          </a:xfrm>
+          <a:prstGeom prst="rect">
+            <a:avLst/>
+          </a:prstGeom>
+          <a:ln w="31750">
+            <a:solidFill>
+              <a:srgbClr val="C8A15A"/>
+            </a:solidFill>
+          </a:ln>
+        </p:spPr>
+      </p:pic>
+      <p:sp>
+        <p:nvSpPr>
+          <p:cNvPr id="9" name="Rectangle 8"/>
           <p:cNvSpPr/>
           <p:nvPr/>
         </p:nvSpPr>
         <p:spPr>
           <a:xfrm>
-            <a:off x="1965960" y="2880360"/>
-            <a:ext cx="1280160" cy="1280160"/>
+            <a:off x="685800" y="2788920"/>
+            <a:ext cx="640080" cy="640080"/>
           </a:xfrm>
           <a:prstGeom prst="rect">
             <a:avLst/>
@@ -23737,14 +23174,14 @@
       </p:sp>
       <p:sp>
         <p:nvSpPr>
-          <p:cNvPr id="9" name="Rectangle 8"/>
+          <p:cNvPr id="10" name="Rectangle 9"/>
           <p:cNvSpPr/>
           <p:nvPr/>
         </p:nvSpPr>
         <p:spPr>
           <a:xfrm>
-            <a:off x="2068372" y="2982772"/>
-            <a:ext cx="1075334" cy="1075334"/>
+            <a:off x="737006" y="2840126"/>
+            <a:ext cx="537667" cy="537667"/>
           </a:xfrm>
           <a:prstGeom prst="rect">
             <a:avLst/>
@@ -23781,14 +23218,14 @@
       </p:sp>
       <p:sp>
         <p:nvSpPr>
-          <p:cNvPr id="10" name="TextBox 9"/>
+          <p:cNvPr id="11" name="TextBox 10"/>
           <p:cNvSpPr txBox="1"/>
           <p:nvPr/>
         </p:nvSpPr>
         <p:spPr>
           <a:xfrm>
-            <a:off x="1965960" y="2880360"/>
-            <a:ext cx="1280160" cy="1280160"/>
+            <a:off x="685800" y="2788920"/>
+            <a:ext cx="640080" cy="640080"/>
           </a:xfrm>
           <a:prstGeom prst="rect">
             <a:avLst/>
@@ -23807,7 +23244,7 @@
               </a:lnSpc>
             </a:pPr>
             <a:r>
-              <a:rPr sz="5500" b="1">
+              <a:rPr sz="2700" b="1">
                 <a:solidFill>
                   <a:srgbClr val="C8A15A"/>
                 </a:solidFill>
@@ -23817,20 +23254,20 @@
               </a:rPr>
               <a:t>楼</a:t>
             </a:r>
-            <a:endParaRPr sz="5500"/>
-          </a:p>
-        </p:txBody>
-      </p:sp>
-      <p:sp>
-        <p:nvSpPr>
-          <p:cNvPr id="11" name="TextBox 10"/>
+            <a:endParaRPr sz="2700"/>
+          </a:p>
+        </p:txBody>
+      </p:sp>
+      <p:sp>
+        <p:nvSpPr>
+          <p:cNvPr id="12" name="TextBox 11"/>
           <p:cNvSpPr txBox="1"/>
           <p:nvPr/>
         </p:nvSpPr>
         <p:spPr>
           <a:xfrm>
-            <a:off x="1143000" y="4251960"/>
-            <a:ext cx="2926080" cy="502920"/>
+            <a:off x="822960" y="4754880"/>
+            <a:ext cx="3291840" cy="457200"/>
           </a:xfrm>
           <a:prstGeom prst="rect">
             <a:avLst/>
@@ -23849,7 +23286,7 @@
               </a:lnSpc>
             </a:pPr>
             <a:r>
-              <a:rPr sz="2400" b="0">
+              <a:rPr sz="2200" b="0">
                 <a:solidFill>
                   <a:srgbClr val="5A5A5A"/>
                 </a:solidFill>
@@ -23859,20 +23296,49 @@
               </a:rPr>
               <a:t>北大红楼</a:t>
             </a:r>
-            <a:endParaRPr sz="2400"/>
-          </a:p>
-        </p:txBody>
-      </p:sp>
-      <p:sp>
-        <p:nvSpPr>
-          <p:cNvPr id="12" name="Rectangle 11"/>
+            <a:endParaRPr sz="2200"/>
+          </a:p>
+        </p:txBody>
+      </p:sp>
+      <p:pic>
+        <p:nvPicPr>
+          <p:cNvPr id="13" name="Picture 12" descr="image.jpg"/>
+          <p:cNvPicPr>
+            <a:picLocks noChangeAspect="1"/>
+          </p:cNvPicPr>
+          <p:nvPr/>
+        </p:nvPicPr>
+        <p:blipFill>
+          <a:blip r:embed="rId4"/>
+          <a:stretch>
+            <a:fillRect/>
+          </a:stretch>
+        </p:blipFill>
+        <p:spPr>
+          <a:xfrm>
+            <a:off x="4434840" y="2926080"/>
+            <a:ext cx="3291840" cy="1828800"/>
+          </a:xfrm>
+          <a:prstGeom prst="rect">
+            <a:avLst/>
+          </a:prstGeom>
+          <a:ln w="31750">
+            <a:solidFill>
+              <a:srgbClr val="C8A15A"/>
+            </a:solidFill>
+          </a:ln>
+        </p:spPr>
+      </p:pic>
+      <p:sp>
+        <p:nvSpPr>
+          <p:cNvPr id="14" name="Rectangle 13"/>
           <p:cNvSpPr/>
           <p:nvPr/>
         </p:nvSpPr>
         <p:spPr>
           <a:xfrm>
-            <a:off x="5440680" y="2880360"/>
-            <a:ext cx="1280160" cy="1280160"/>
+            <a:off x="4297680" y="2788920"/>
+            <a:ext cx="640080" cy="640080"/>
           </a:xfrm>
           <a:prstGeom prst="rect">
             <a:avLst/>
@@ -23911,14 +23377,14 @@
       </p:sp>
       <p:sp>
         <p:nvSpPr>
-          <p:cNvPr id="13" name="Rectangle 12"/>
+          <p:cNvPr id="15" name="Rectangle 14"/>
           <p:cNvSpPr/>
           <p:nvPr/>
         </p:nvSpPr>
         <p:spPr>
           <a:xfrm>
-            <a:off x="5543092" y="2982772"/>
-            <a:ext cx="1075334" cy="1075334"/>
+            <a:off x="4348886" y="2840126"/>
+            <a:ext cx="537667" cy="537667"/>
           </a:xfrm>
           <a:prstGeom prst="rect">
             <a:avLst/>
@@ -23955,14 +23421,14 @@
       </p:sp>
       <p:sp>
         <p:nvSpPr>
-          <p:cNvPr id="14" name="TextBox 13"/>
+          <p:cNvPr id="16" name="TextBox 15"/>
           <p:cNvSpPr txBox="1"/>
           <p:nvPr/>
         </p:nvSpPr>
         <p:spPr>
           <a:xfrm>
-            <a:off x="5440680" y="2880360"/>
-            <a:ext cx="1280160" cy="1280160"/>
+            <a:off x="4297680" y="2788920"/>
+            <a:ext cx="640080" cy="640080"/>
           </a:xfrm>
           <a:prstGeom prst="rect">
             <a:avLst/>
@@ -23981,7 +23447,7 @@
               </a:lnSpc>
             </a:pPr>
             <a:r>
-              <a:rPr sz="5500" b="1">
+              <a:rPr sz="2700" b="1">
                 <a:solidFill>
                   <a:srgbClr val="C8A15A"/>
                 </a:solidFill>
@@ -23991,20 +23457,20 @@
               </a:rPr>
               <a:t>房</a:t>
             </a:r>
-            <a:endParaRPr sz="5500"/>
-          </a:p>
-        </p:txBody>
-      </p:sp>
-      <p:sp>
-        <p:nvSpPr>
-          <p:cNvPr id="15" name="TextBox 14"/>
+            <a:endParaRPr sz="2700"/>
+          </a:p>
+        </p:txBody>
+      </p:sp>
+      <p:sp>
+        <p:nvSpPr>
+          <p:cNvPr id="17" name="TextBox 16"/>
           <p:cNvSpPr txBox="1"/>
           <p:nvPr/>
         </p:nvSpPr>
         <p:spPr>
           <a:xfrm>
-            <a:off x="4617720" y="4251960"/>
-            <a:ext cx="2926080" cy="502920"/>
+            <a:off x="4434840" y="4754880"/>
+            <a:ext cx="3291840" cy="457200"/>
           </a:xfrm>
           <a:prstGeom prst="rect">
             <a:avLst/>
@@ -24023,7 +23489,7 @@
               </a:lnSpc>
             </a:pPr>
             <a:r>
-              <a:rPr sz="2400" b="0">
+              <a:rPr sz="2200" b="0">
                 <a:solidFill>
                   <a:srgbClr val="5A5A5A"/>
                 </a:solidFill>
@@ -24033,20 +23499,49 @@
               </a:rPr>
               <a:t>上海石库门</a:t>
             </a:r>
-            <a:endParaRPr sz="2400"/>
-          </a:p>
-        </p:txBody>
-      </p:sp>
-      <p:sp>
-        <p:nvSpPr>
-          <p:cNvPr id="16" name="Rectangle 15"/>
+            <a:endParaRPr sz="2200"/>
+          </a:p>
+        </p:txBody>
+      </p:sp>
+      <p:pic>
+        <p:nvPicPr>
+          <p:cNvPr id="18" name="Picture 17" descr="image.jpg"/>
+          <p:cNvPicPr>
+            <a:picLocks noChangeAspect="1"/>
+          </p:cNvPicPr>
+          <p:nvPr/>
+        </p:nvPicPr>
+        <p:blipFill>
+          <a:blip r:embed="rId5"/>
+          <a:stretch>
+            <a:fillRect/>
+          </a:stretch>
+        </p:blipFill>
+        <p:spPr>
+          <a:xfrm>
+            <a:off x="8046720" y="2926080"/>
+            <a:ext cx="3291840" cy="1828800"/>
+          </a:xfrm>
+          <a:prstGeom prst="rect">
+            <a:avLst/>
+          </a:prstGeom>
+          <a:ln w="31750">
+            <a:solidFill>
+              <a:srgbClr val="C8A15A"/>
+            </a:solidFill>
+          </a:ln>
+        </p:spPr>
+      </p:pic>
+      <p:sp>
+        <p:nvSpPr>
+          <p:cNvPr id="19" name="Rectangle 18"/>
           <p:cNvSpPr/>
           <p:nvPr/>
         </p:nvSpPr>
         <p:spPr>
           <a:xfrm>
-            <a:off x="8915400" y="2880360"/>
-            <a:ext cx="1280160" cy="1280160"/>
+            <a:off x="7909560" y="2788920"/>
+            <a:ext cx="640080" cy="640080"/>
           </a:xfrm>
           <a:prstGeom prst="rect">
             <a:avLst/>
@@ -24085,14 +23580,14 @@
       </p:sp>
       <p:sp>
         <p:nvSpPr>
-          <p:cNvPr id="17" name="Rectangle 16"/>
+          <p:cNvPr id="20" name="Rectangle 19"/>
           <p:cNvSpPr/>
           <p:nvPr/>
         </p:nvSpPr>
         <p:spPr>
           <a:xfrm>
-            <a:off x="9017812" y="2982772"/>
-            <a:ext cx="1075334" cy="1075334"/>
+            <a:off x="7960766" y="2840126"/>
+            <a:ext cx="537667" cy="537667"/>
           </a:xfrm>
           <a:prstGeom prst="rect">
             <a:avLst/>
@@ -24129,14 +23624,14 @@
       </p:sp>
       <p:sp>
         <p:nvSpPr>
-          <p:cNvPr id="18" name="TextBox 17"/>
+          <p:cNvPr id="21" name="TextBox 20"/>
           <p:cNvSpPr txBox="1"/>
           <p:nvPr/>
         </p:nvSpPr>
         <p:spPr>
           <a:xfrm>
-            <a:off x="8915400" y="2880360"/>
-            <a:ext cx="1280160" cy="1280160"/>
+            <a:off x="7909560" y="2788920"/>
+            <a:ext cx="640080" cy="640080"/>
           </a:xfrm>
           <a:prstGeom prst="rect">
             <a:avLst/>
@@ -24155,7 +23650,7 @@
               </a:lnSpc>
             </a:pPr>
             <a:r>
-              <a:rPr sz="5500" b="1">
+              <a:rPr sz="2700" b="1">
                 <a:solidFill>
                   <a:srgbClr val="C8A15A"/>
                 </a:solidFill>
@@ -24165,20 +23660,20 @@
               </a:rPr>
               <a:t>船</a:t>
             </a:r>
-            <a:endParaRPr sz="5500"/>
-          </a:p>
-        </p:txBody>
-      </p:sp>
-      <p:sp>
-        <p:nvSpPr>
-          <p:cNvPr id="19" name="TextBox 18"/>
+            <a:endParaRPr sz="2700"/>
+          </a:p>
+        </p:txBody>
+      </p:sp>
+      <p:sp>
+        <p:nvSpPr>
+          <p:cNvPr id="22" name="TextBox 21"/>
           <p:cNvSpPr txBox="1"/>
           <p:nvPr/>
         </p:nvSpPr>
         <p:spPr>
           <a:xfrm>
-            <a:off x="8092440" y="4251960"/>
-            <a:ext cx="2926080" cy="502920"/>
+            <a:off x="8046720" y="4754880"/>
+            <a:ext cx="3291840" cy="457200"/>
           </a:xfrm>
           <a:prstGeom prst="rect">
             <a:avLst/>
@@ -24197,7 +23692,7 @@
               </a:lnSpc>
             </a:pPr>
             <a:r>
-              <a:rPr sz="2400" b="0">
+              <a:rPr sz="2200" b="0">
                 <a:solidFill>
                   <a:srgbClr val="5A5A5A"/>
                 </a:solidFill>
@@ -24207,20 +23702,20 @@
               </a:rPr>
               <a:t>南湖红船</a:t>
             </a:r>
-            <a:endParaRPr sz="2400"/>
-          </a:p>
-        </p:txBody>
-      </p:sp>
-      <p:sp>
-        <p:nvSpPr>
-          <p:cNvPr id="20" name="TextBox 19"/>
+            <a:endParaRPr sz="2200"/>
+          </a:p>
+        </p:txBody>
+      </p:sp>
+      <p:sp>
+        <p:nvSpPr>
+          <p:cNvPr id="23" name="TextBox 22"/>
           <p:cNvSpPr txBox="1"/>
           <p:nvPr/>
         </p:nvSpPr>
         <p:spPr>
           <a:xfrm>
-            <a:off x="822960" y="4983480"/>
-            <a:ext cx="10515600" cy="822960"/>
+            <a:off x="822960" y="5212080"/>
+            <a:ext cx="10515600" cy="685800"/>
           </a:xfrm>
           <a:prstGeom prst="rect">
             <a:avLst/>
@@ -24239,7 +23734,7 @@
               </a:lnSpc>
             </a:pPr>
             <a:r>
-              <a:rPr sz="4400" b="1">
+              <a:rPr sz="4000" b="1">
                 <a:solidFill>
                   <a:srgbClr val="7A1212"/>
                 </a:solidFill>
@@ -24249,19 +23744,19 @@
               </a:rPr>
               <a:t>谢谢大家</a:t>
             </a:r>
-            <a:endParaRPr sz="4400"/>
-          </a:p>
-        </p:txBody>
-      </p:sp>
-      <p:sp>
-        <p:nvSpPr>
-          <p:cNvPr id="21" name="TextBox 20"/>
+            <a:endParaRPr sz="4000"/>
+          </a:p>
+        </p:txBody>
+      </p:sp>
+      <p:sp>
+        <p:nvSpPr>
+          <p:cNvPr id="24" name="TextBox 23"/>
           <p:cNvSpPr txBox="1"/>
           <p:nvPr/>
         </p:nvSpPr>
         <p:spPr>
           <a:xfrm>
-            <a:off x="822960" y="5806440"/>
+            <a:off x="822960" y="5870448"/>
             <a:ext cx="10515600" cy="457200"/>
           </a:xfrm>
           <a:prstGeom prst="rect">
@@ -25447,6 +24942,359 @@
 </p:sld>
 </file>
 
+<file path=ppt/slides/slide30.xml><?xml version="1.0" encoding="utf-8"?>
+<p:sld xmlns:a="http://schemas.openxmlformats.org/drawingml/2006/main" xmlns:p="http://schemas.openxmlformats.org/presentationml/2006/main" xmlns:r="http://schemas.openxmlformats.org/officeDocument/2006/relationships">
+  <p:cSld>
+    <p:bg>
+      <p:bgPr>
+        <a:solidFill>
+          <a:srgbClr val="FBF6EE"/>
+        </a:solidFill>
+        <a:effectLst/>
+      </p:bgPr>
+    </p:bg>
+    <p:spTree>
+      <p:nvGrpSpPr>
+        <p:cNvPr id="1" name=""/>
+        <p:cNvGrpSpPr/>
+        <p:nvPr/>
+      </p:nvGrpSpPr>
+      <p:grpSpPr/>
+      <p:sp>
+        <p:nvSpPr>
+          <p:cNvPr id="2" name="Rectangle 1"/>
+          <p:cNvSpPr/>
+          <p:nvPr/>
+        </p:nvSpPr>
+        <p:spPr>
+          <a:xfrm>
+            <a:off x="0" y="0"/>
+            <a:ext cx="201168" cy="6858000"/>
+          </a:xfrm>
+          <a:prstGeom prst="rect">
+            <a:avLst/>
+          </a:prstGeom>
+          <a:solidFill>
+            <a:srgbClr val="9E1B1B"/>
+          </a:solidFill>
+          <a:ln>
+            <a:noFill/>
+          </a:ln>
+          <a:effectLst/>
+        </p:spPr>
+        <p:style>
+          <a:lnRef idx="1">
+            <a:schemeClr val="accent1"/>
+          </a:lnRef>
+          <a:fillRef idx="3">
+            <a:schemeClr val="accent1"/>
+          </a:fillRef>
+          <a:effectRef idx="2">
+            <a:schemeClr val="accent1"/>
+          </a:effectRef>
+          <a:fontRef idx="minor">
+            <a:schemeClr val="lt1"/>
+          </a:fontRef>
+        </p:style>
+        <p:txBody>
+          <a:bodyPr rtlCol="0" anchor="ctr"/>
+          <a:lstStyle/>
+          <a:p>
+            <a:pPr algn="ctr"/>
+          </a:p>
+        </p:txBody>
+      </p:sp>
+      <p:sp>
+        <p:nvSpPr>
+          <p:cNvPr id="3" name="TextBox 2"/>
+          <p:cNvSpPr txBox="1"/>
+          <p:nvPr/>
+        </p:nvSpPr>
+        <p:spPr>
+          <a:xfrm>
+            <a:off x="822960" y="457200"/>
+            <a:ext cx="10515600" cy="640080"/>
+          </a:xfrm>
+          <a:prstGeom prst="rect">
+            <a:avLst/>
+          </a:prstGeom>
+          <a:noFill/>
+        </p:spPr>
+        <p:txBody>
+          <a:bodyPr wrap="square" anchor="t" lIns="36576" rIns="36576" tIns="36576" bIns="36576">
+            <a:noAutofit/>
+          </a:bodyPr>
+          <a:lstStyle/>
+          <a:p>
+            <a:pPr algn="l">
+              <a:lnSpc>
+                <a:spcPct val="120000"/>
+              </a:lnSpc>
+            </a:pPr>
+            <a:r>
+              <a:rPr sz="3200" b="1">
+                <a:solidFill>
+                  <a:srgbClr val="7A1212"/>
+                </a:solidFill>
+                <a:latin typeface="Microsoft YaHei"/>
+                <a:ea typeface="Microsoft YaHei"/>
+                <a:cs typeface="Microsoft YaHei"/>
+              </a:rPr>
+              <a:t>图片来源</a:t>
+            </a:r>
+            <a:endParaRPr sz="3200"/>
+          </a:p>
+        </p:txBody>
+      </p:sp>
+      <p:sp>
+        <p:nvSpPr>
+          <p:cNvPr id="4" name="TextBox 3"/>
+          <p:cNvSpPr txBox="1"/>
+          <p:nvPr/>
+        </p:nvSpPr>
+        <p:spPr>
+          <a:xfrm>
+            <a:off x="822960" y="1325880"/>
+            <a:ext cx="10515600" cy="4572000"/>
+          </a:xfrm>
+          <a:prstGeom prst="rect">
+            <a:avLst/>
+          </a:prstGeom>
+          <a:noFill/>
+        </p:spPr>
+        <p:txBody>
+          <a:bodyPr wrap="square" anchor="t" lIns="36576" rIns="36576" tIns="36576" bIns="36576">
+            <a:noAutofit/>
+          </a:bodyPr>
+          <a:lstStyle/>
+          <a:p>
+            <a:pPr algn="l">
+              <a:lnSpc>
+                <a:spcPct val="105000"/>
+              </a:lnSpc>
+              <a:spcAft>
+                <a:spcPts val="400"/>
+              </a:spcAft>
+            </a:pPr>
+            <a:r>
+              <a:rPr sz="2000" b="0">
+                <a:solidFill>
+                  <a:srgbClr val="5A5A5A"/>
+                </a:solidFill>
+                <a:latin typeface="Microsoft YaHei"/>
+                <a:ea typeface="Microsoft YaHei"/>
+                <a:cs typeface="Microsoft YaHei"/>
+              </a:rPr>
+              <a:t>北大红楼：N509FZ，CC BY-SA 4.0</a:t>
+            </a:r>
+            <a:endParaRPr sz="2000"/>
+          </a:p>
+          <a:p>
+            <a:pPr algn="l">
+              <a:lnSpc>
+                <a:spcPct val="105000"/>
+              </a:lnSpc>
+              <a:spcAft>
+                <a:spcPts val="400"/>
+              </a:spcAft>
+            </a:pPr>
+            <a:r>
+              <a:rPr sz="2000" b="0">
+                <a:solidFill>
+                  <a:srgbClr val="5A5A5A"/>
+                </a:solidFill>
+                <a:latin typeface="Microsoft YaHei"/>
+                <a:ea typeface="Microsoft YaHei"/>
+                <a:cs typeface="Microsoft YaHei"/>
+              </a:rPr>
+              <a:t>中共一大会址：ScareCriterion12，CC BY-SA 4.0</a:t>
+            </a:r>
+            <a:endParaRPr sz="2000"/>
+          </a:p>
+          <a:p>
+            <a:pPr algn="l">
+              <a:lnSpc>
+                <a:spcPct val="105000"/>
+              </a:lnSpc>
+              <a:spcAft>
+                <a:spcPts val="400"/>
+              </a:spcAft>
+            </a:pPr>
+            <a:r>
+              <a:rPr sz="2000" b="0">
+                <a:solidFill>
+                  <a:srgbClr val="5A5A5A"/>
+                </a:solidFill>
+                <a:latin typeface="Microsoft YaHei"/>
+                <a:ea typeface="Microsoft YaHei"/>
+                <a:cs typeface="Microsoft YaHei"/>
+              </a:rPr>
+              <a:t>南湖红船：ScareCriterion12，CC BY-SA 4.0</a:t>
+            </a:r>
+            <a:endParaRPr sz="2000"/>
+          </a:p>
+          <a:p>
+            <a:pPr algn="l">
+              <a:lnSpc>
+                <a:spcPct val="105000"/>
+              </a:lnSpc>
+              <a:spcAft>
+                <a:spcPts val="400"/>
+              </a:spcAft>
+            </a:pPr>
+            <a:r>
+              <a:rPr sz="2000" b="0">
+                <a:solidFill>
+                  <a:srgbClr val="5A5A5A"/>
+                </a:solidFill>
+                <a:latin typeface="Microsoft YaHei"/>
+                <a:ea typeface="Microsoft YaHei"/>
+                <a:cs typeface="Microsoft YaHei"/>
+              </a:rPr>
+              <a:t>毛泽东（1919年）：佚名，Public domain</a:t>
+            </a:r>
+            <a:endParaRPr sz="2000"/>
+          </a:p>
+          <a:p>
+            <a:pPr algn="l">
+              <a:lnSpc>
+                <a:spcPct val="105000"/>
+              </a:lnSpc>
+              <a:spcAft>
+                <a:spcPts val="400"/>
+              </a:spcAft>
+            </a:pPr>
+            <a:r>
+              <a:rPr sz="2000" b="0">
+                <a:solidFill>
+                  <a:srgbClr val="5A5A5A"/>
+                </a:solidFill>
+                <a:latin typeface="Microsoft YaHei"/>
+                <a:ea typeface="Microsoft YaHei"/>
+                <a:cs typeface="Microsoft YaHei"/>
+              </a:rPr>
+              <a:t>中共一大会址石库门：Can Pac Swire from Toronto, Canada，CC BY-SA 2.0</a:t>
+            </a:r>
+            <a:endParaRPr sz="2000"/>
+          </a:p>
+          <a:p>
+            <a:pPr algn="l">
+              <a:lnSpc>
+                <a:spcPct val="105000"/>
+              </a:lnSpc>
+              <a:spcAft>
+                <a:spcPts val="400"/>
+              </a:spcAft>
+            </a:pPr>
+            <a:r>
+              <a:rPr sz="2000" b="0">
+                <a:solidFill>
+                  <a:srgbClr val="5A5A5A"/>
+                </a:solidFill>
+                <a:latin typeface="Microsoft YaHei"/>
+                <a:ea typeface="Microsoft YaHei"/>
+                <a:cs typeface="Microsoft YaHei"/>
+              </a:rPr>
+              <a:t>望志路106号门牌：N509FZ，CC BY-SA 4.0</a:t>
+            </a:r>
+            <a:endParaRPr sz="2000"/>
+          </a:p>
+          <a:p>
+            <a:pPr algn="l">
+              <a:lnSpc>
+                <a:spcPct val="105000"/>
+              </a:lnSpc>
+              <a:spcAft>
+                <a:spcPts val="400"/>
+              </a:spcAft>
+            </a:pPr>
+            <a:r>
+              <a:rPr sz="2000" b="0">
+                <a:solidFill>
+                  <a:srgbClr val="5A5A5A"/>
+                </a:solidFill>
+                <a:latin typeface="Microsoft YaHei"/>
+                <a:ea typeface="Microsoft YaHei"/>
+                <a:cs typeface="Microsoft YaHei"/>
+              </a:rPr>
+              <a:t>南湖红船（侧面）：钉钉，CC BY-SA 4.0</a:t>
+            </a:r>
+            <a:endParaRPr sz="2000"/>
+          </a:p>
+          <a:p>
+            <a:pPr algn="l">
+              <a:lnSpc>
+                <a:spcPct val="105000"/>
+              </a:lnSpc>
+              <a:spcAft>
+                <a:spcPts val="400"/>
+              </a:spcAft>
+            </a:pPr>
+            <a:r>
+              <a:rPr sz="2000" b="0">
+                <a:solidFill>
+                  <a:srgbClr val="5A5A5A"/>
+                </a:solidFill>
+                <a:latin typeface="Microsoft YaHei"/>
+                <a:ea typeface="Microsoft YaHei"/>
+                <a:cs typeface="Microsoft YaHei"/>
+              </a:rPr>
+              <a:t>王会悟：佚名，Public domain</a:t>
+            </a:r>
+            <a:endParaRPr sz="2000"/>
+          </a:p>
+        </p:txBody>
+      </p:sp>
+      <p:sp>
+        <p:nvSpPr>
+          <p:cNvPr id="5" name="TextBox 4"/>
+          <p:cNvSpPr txBox="1"/>
+          <p:nvPr/>
+        </p:nvSpPr>
+        <p:spPr>
+          <a:xfrm>
+            <a:off x="822960" y="6035040"/>
+            <a:ext cx="10515600" cy="457200"/>
+          </a:xfrm>
+          <a:prstGeom prst="rect">
+            <a:avLst/>
+          </a:prstGeom>
+          <a:noFill/>
+        </p:spPr>
+        <p:txBody>
+          <a:bodyPr wrap="square" anchor="t" lIns="36576" rIns="36576" tIns="36576" bIns="36576">
+            <a:noAutofit/>
+          </a:bodyPr>
+          <a:lstStyle/>
+          <a:p>
+            <a:pPr algn="l">
+              <a:lnSpc>
+                <a:spcPct val="120000"/>
+              </a:lnSpc>
+            </a:pPr>
+            <a:r>
+              <a:rPr sz="2000" b="0">
+                <a:solidFill>
+                  <a:srgbClr val="5A5A5A"/>
+                </a:solidFill>
+                <a:latin typeface="Microsoft YaHei"/>
+                <a:ea typeface="Microsoft YaHei"/>
+                <a:cs typeface="Microsoft YaHei"/>
+              </a:rPr>
+              <a:t>以上图片均来自 Wikimedia Commons，按原许可协议使用。</a:t>
+            </a:r>
+            <a:endParaRPr sz="2000"/>
+          </a:p>
+        </p:txBody>
+      </p:sp>
+    </p:spTree>
+  </p:cSld>
+  <p:clrMapOvr>
+    <a:masterClrMapping/>
+  </p:clrMapOvr>
+</p:sld>
+</file>
+
 <file path=ppt/slides/slide4.xml><?xml version="1.0" encoding="utf-8"?>
 <p:sld xmlns:a="http://schemas.openxmlformats.org/drawingml/2006/main" xmlns:p="http://schemas.openxmlformats.org/presentationml/2006/main" xmlns:r="http://schemas.openxmlformats.org/officeDocument/2006/relationships">
   <p:cSld>
@@ -27454,16 +27302,40 @@
         <p:nvPr/>
       </p:nvGrpSpPr>
       <p:grpSpPr/>
-      <p:sp>
-        <p:nvSpPr>
-          <p:cNvPr id="2" name="Rectangle 1"/>
+      <p:pic>
+        <p:nvPicPr>
+          <p:cNvPr id="2" name="Picture 1" descr="image.jpg"/>
+          <p:cNvPicPr>
+            <a:picLocks noChangeAspect="1"/>
+          </p:cNvPicPr>
+          <p:nvPr/>
+        </p:nvPicPr>
+        <p:blipFill>
+          <a:blip r:embed="rId3"/>
+          <a:stretch>
+            <a:fillRect/>
+          </a:stretch>
+        </p:blipFill>
+        <p:spPr>
+          <a:xfrm>
+            <a:off x="0" y="0"/>
+            <a:ext cx="6217920" cy="6858000"/>
+          </a:xfrm>
+          <a:prstGeom prst="rect">
+            <a:avLst/>
+          </a:prstGeom>
+        </p:spPr>
+      </p:pic>
+      <p:sp>
+        <p:nvSpPr>
+          <p:cNvPr id="3" name="Rectangle 2"/>
           <p:cNvSpPr/>
           <p:nvPr/>
         </p:nvSpPr>
         <p:spPr>
           <a:xfrm>
-            <a:off x="0" y="411480"/>
-            <a:ext cx="12191695" cy="36576"/>
+            <a:off x="5943600" y="411480"/>
+            <a:ext cx="6248095" cy="36576"/>
           </a:xfrm>
           <a:prstGeom prst="rect">
             <a:avLst/>
@@ -27500,14 +27372,14 @@
       </p:sp>
       <p:sp>
         <p:nvSpPr>
-          <p:cNvPr id="3" name="Rectangle 2"/>
+          <p:cNvPr id="4" name="Rectangle 3"/>
           <p:cNvSpPr/>
           <p:nvPr/>
         </p:nvSpPr>
         <p:spPr>
           <a:xfrm>
-            <a:off x="0" y="6409944"/>
-            <a:ext cx="12191695" cy="36576"/>
+            <a:off x="5943600" y="6409944"/>
+            <a:ext cx="6248095" cy="36576"/>
           </a:xfrm>
           <a:prstGeom prst="rect">
             <a:avLst/>
@@ -27544,14 +27416,14 @@
       </p:sp>
       <p:sp>
         <p:nvSpPr>
-          <p:cNvPr id="4" name="Rectangle 3"/>
+          <p:cNvPr id="5" name="Rectangle 4"/>
           <p:cNvSpPr/>
           <p:nvPr/>
         </p:nvSpPr>
         <p:spPr>
           <a:xfrm>
-            <a:off x="1554480" y="1737360"/>
-            <a:ext cx="3108960" cy="3108960"/>
+            <a:off x="6400800" y="914400"/>
+            <a:ext cx="914400" cy="914400"/>
           </a:xfrm>
           <a:prstGeom prst="rect">
             <a:avLst/>
@@ -27590,14 +27462,14 @@
       </p:sp>
       <p:sp>
         <p:nvSpPr>
-          <p:cNvPr id="5" name="Rectangle 4"/>
+          <p:cNvPr id="6" name="Rectangle 5"/>
           <p:cNvSpPr/>
           <p:nvPr/>
         </p:nvSpPr>
         <p:spPr>
           <a:xfrm>
-            <a:off x="1803196" y="1986076"/>
-            <a:ext cx="2611526" cy="2611526"/>
+            <a:off x="6473952" y="987552"/>
+            <a:ext cx="768096" cy="768096"/>
           </a:xfrm>
           <a:prstGeom prst="rect">
             <a:avLst/>
@@ -27634,14 +27506,14 @@
       </p:sp>
       <p:sp>
         <p:nvSpPr>
-          <p:cNvPr id="6" name="TextBox 5"/>
+          <p:cNvPr id="7" name="TextBox 6"/>
           <p:cNvSpPr txBox="1"/>
           <p:nvPr/>
         </p:nvSpPr>
         <p:spPr>
           <a:xfrm>
-            <a:off x="1554480" y="1737360"/>
-            <a:ext cx="3108960" cy="3108960"/>
+            <a:off x="6400800" y="914400"/>
+            <a:ext cx="914400" cy="914400"/>
           </a:xfrm>
           <a:prstGeom prst="rect">
             <a:avLst/>
@@ -27660,7 +27532,7 @@
               </a:lnSpc>
             </a:pPr>
             <a:r>
-              <a:rPr sz="13400" b="1">
+              <a:rPr sz="3900" b="1">
                 <a:solidFill>
                   <a:srgbClr val="C8A15A"/>
                 </a:solidFill>
@@ -27670,20 +27542,20 @@
               </a:rPr>
               <a:t>楼</a:t>
             </a:r>
-            <a:endParaRPr sz="13400"/>
-          </a:p>
-        </p:txBody>
-      </p:sp>
-      <p:sp>
-        <p:nvSpPr>
-          <p:cNvPr id="7" name="TextBox 6"/>
+            <a:endParaRPr sz="3900"/>
+          </a:p>
+        </p:txBody>
+      </p:sp>
+      <p:sp>
+        <p:nvSpPr>
+          <p:cNvPr id="8" name="TextBox 7"/>
           <p:cNvSpPr txBox="1"/>
           <p:nvPr/>
         </p:nvSpPr>
         <p:spPr>
           <a:xfrm>
-            <a:off x="5394960" y="1783080"/>
-            <a:ext cx="6400800" cy="548640"/>
+            <a:off x="6400800" y="2011680"/>
+            <a:ext cx="5486400" cy="548640"/>
           </a:xfrm>
           <a:prstGeom prst="rect">
             <a:avLst/>
@@ -27718,14 +27590,14 @@
       </p:sp>
       <p:sp>
         <p:nvSpPr>
-          <p:cNvPr id="8" name="TextBox 7"/>
+          <p:cNvPr id="9" name="TextBox 8"/>
           <p:cNvSpPr txBox="1"/>
           <p:nvPr/>
         </p:nvSpPr>
         <p:spPr>
           <a:xfrm>
-            <a:off x="5394960" y="2377440"/>
-            <a:ext cx="6400800" cy="1188720"/>
+            <a:off x="6400800" y="2606040"/>
+            <a:ext cx="5486400" cy="1188720"/>
           </a:xfrm>
           <a:prstGeom prst="rect">
             <a:avLst/>
@@ -27760,14 +27632,14 @@
       </p:sp>
       <p:sp>
         <p:nvSpPr>
-          <p:cNvPr id="9" name="TextBox 8"/>
+          <p:cNvPr id="10" name="TextBox 9"/>
           <p:cNvSpPr txBox="1"/>
           <p:nvPr/>
         </p:nvSpPr>
         <p:spPr>
           <a:xfrm>
-            <a:off x="5394960" y="3657600"/>
-            <a:ext cx="6400800" cy="594360"/>
+            <a:off x="6400800" y="3886200"/>
+            <a:ext cx="5486400" cy="594360"/>
           </a:xfrm>
           <a:prstGeom prst="rect">
             <a:avLst/>
@@ -27802,14 +27674,14 @@
       </p:sp>
       <p:sp>
         <p:nvSpPr>
-          <p:cNvPr id="10" name="TextBox 9"/>
+          <p:cNvPr id="11" name="TextBox 10"/>
           <p:cNvSpPr txBox="1"/>
           <p:nvPr/>
         </p:nvSpPr>
         <p:spPr>
           <a:xfrm>
-            <a:off x="5394960" y="4343400"/>
-            <a:ext cx="6400800" cy="502920"/>
+            <a:off x="6400800" y="4572000"/>
+            <a:ext cx="5486400" cy="502920"/>
           </a:xfrm>
           <a:prstGeom prst="rect">
             <a:avLst/>
@@ -27844,7 +27716,7 @@
       </p:sp>
       <p:sp>
         <p:nvSpPr>
-          <p:cNvPr id="11" name="TextBox 10"/>
+          <p:cNvPr id="12" name="TextBox 11"/>
           <p:cNvSpPr txBox="1"/>
           <p:nvPr/>
         </p:nvSpPr>
@@ -27872,7 +27744,7 @@
             <a:r>
               <a:rPr sz="2000" b="0">
                 <a:solidFill>
-                  <a:srgbClr val="C8A15A"/>
+                  <a:srgbClr val="F7E7C6"/>
                 </a:solidFill>
                 <a:latin typeface="Microsoft YaHei"/>
                 <a:ea typeface="Microsoft YaHei"/>
@@ -28007,7 +27879,7 @@
         <p:spPr>
           <a:xfrm>
             <a:off x="822960" y="384048"/>
-            <a:ext cx="8229600" cy="411480"/>
+            <a:ext cx="10607040" cy="411480"/>
           </a:xfrm>
           <a:prstGeom prst="rect">
             <a:avLst/>
@@ -28307,7 +28179,7 @@
         <p:spPr>
           <a:xfrm>
             <a:off x="2651760" y="2606040"/>
-            <a:ext cx="8686800" cy="841248"/>
+            <a:ext cx="5029200" cy="841248"/>
           </a:xfrm>
           <a:prstGeom prst="rect">
             <a:avLst/>
@@ -28322,7 +28194,7 @@
           <a:p>
             <a:pPr algn="l">
               <a:lnSpc>
-                <a:spcPct val="120000"/>
+                <a:spcPct val="110000"/>
               </a:lnSpc>
             </a:pPr>
             <a:r>
@@ -28349,7 +28221,7 @@
         <p:spPr>
           <a:xfrm>
             <a:off x="2651760" y="3575304"/>
-            <a:ext cx="8686800" cy="18288"/>
+            <a:ext cx="5029200" cy="18288"/>
           </a:xfrm>
           <a:prstGeom prst="rect">
             <a:avLst/>
@@ -28481,7 +28353,7 @@
         <p:spPr>
           <a:xfrm>
             <a:off x="2651760" y="3703320"/>
-            <a:ext cx="8686800" cy="841248"/>
+            <a:ext cx="5029200" cy="841248"/>
           </a:xfrm>
           <a:prstGeom prst="rect">
             <a:avLst/>
@@ -28496,7 +28368,7 @@
           <a:p>
             <a:pPr algn="l">
               <a:lnSpc>
-                <a:spcPct val="120000"/>
+                <a:spcPct val="110000"/>
               </a:lnSpc>
             </a:pPr>
             <a:r>
@@ -28523,7 +28395,7 @@
         <p:spPr>
           <a:xfrm>
             <a:off x="2651760" y="4672583"/>
-            <a:ext cx="8686800" cy="18288"/>
+            <a:ext cx="5029200" cy="18288"/>
           </a:xfrm>
           <a:prstGeom prst="rect">
             <a:avLst/>
@@ -28655,7 +28527,7 @@
         <p:spPr>
           <a:xfrm>
             <a:off x="2651760" y="4800600"/>
-            <a:ext cx="8686800" cy="841248"/>
+            <a:ext cx="5029200" cy="841248"/>
           </a:xfrm>
           <a:prstGeom prst="rect">
             <a:avLst/>
@@ -28670,21 +28542,92 @@
           <a:p>
             <a:pPr algn="l">
               <a:lnSpc>
+                <a:spcPct val="110000"/>
+              </a:lnSpc>
+            </a:pPr>
+            <a:r>
+              <a:rPr sz="2400" b="0">
+                <a:solidFill>
+                  <a:srgbClr val="2B2B2B"/>
+                </a:solidFill>
+                <a:latin typeface="Microsoft YaHei"/>
+                <a:ea typeface="Microsoft YaHei"/>
+                <a:cs typeface="Microsoft YaHei"/>
+              </a:rPr>
+              <a:t>李大钊在这里指导成立北京共产党小组</a:t>
+            </a:r>
+            <a:endParaRPr sz="2400"/>
+          </a:p>
+        </p:txBody>
+      </p:sp>
+      <p:pic>
+        <p:nvPicPr>
+          <p:cNvPr id="20" name="Picture 19" descr="image.jpg"/>
+          <p:cNvPicPr>
+            <a:picLocks noChangeAspect="1"/>
+          </p:cNvPicPr>
+          <p:nvPr/>
+        </p:nvPicPr>
+        <p:blipFill>
+          <a:blip r:embed="rId3"/>
+          <a:stretch>
+            <a:fillRect/>
+          </a:stretch>
+        </p:blipFill>
+        <p:spPr>
+          <a:xfrm>
+            <a:off x="8001000" y="2606040"/>
+            <a:ext cx="3337560" cy="3200400"/>
+          </a:xfrm>
+          <a:prstGeom prst="rect">
+            <a:avLst/>
+          </a:prstGeom>
+          <a:ln w="31750">
+            <a:solidFill>
+              <a:srgbClr val="C8A15A"/>
+            </a:solidFill>
+          </a:ln>
+        </p:spPr>
+      </p:pic>
+      <p:sp>
+        <p:nvSpPr>
+          <p:cNvPr id="21" name="TextBox 20"/>
+          <p:cNvSpPr txBox="1"/>
+          <p:nvPr/>
+        </p:nvSpPr>
+        <p:spPr>
+          <a:xfrm>
+            <a:off x="8001000" y="5833872"/>
+            <a:ext cx="3337560" cy="411480"/>
+          </a:xfrm>
+          <a:prstGeom prst="rect">
+            <a:avLst/>
+          </a:prstGeom>
+          <a:noFill/>
+        </p:spPr>
+        <p:txBody>
+          <a:bodyPr wrap="square" anchor="t" lIns="36576" rIns="36576" tIns="36576" bIns="36576">
+            <a:noAutofit/>
+          </a:bodyPr>
+          <a:lstStyle/>
+          <a:p>
+            <a:pPr algn="ctr">
+              <a:lnSpc>
                 <a:spcPct val="120000"/>
               </a:lnSpc>
             </a:pPr>
             <a:r>
-              <a:rPr sz="2400" b="0">
-                <a:solidFill>
-                  <a:srgbClr val="2B2B2B"/>
-                </a:solidFill>
-                <a:latin typeface="Microsoft YaHei"/>
-                <a:ea typeface="Microsoft YaHei"/>
-                <a:cs typeface="Microsoft YaHei"/>
-              </a:rPr>
-              <a:t>李大钊在这里指导成立北京共产党小组</a:t>
-            </a:r>
-            <a:endParaRPr sz="2400"/>
+              <a:rPr sz="2000" b="0">
+                <a:solidFill>
+                  <a:srgbClr val="5A5A5A"/>
+                </a:solidFill>
+                <a:latin typeface="Microsoft YaHei"/>
+                <a:ea typeface="Microsoft YaHei"/>
+                <a:cs typeface="Microsoft YaHei"/>
+              </a:rPr>
+              <a:t>北大红楼</a:t>
+            </a:r>
+            <a:endParaRPr sz="2000"/>
           </a:p>
         </p:txBody>
       </p:sp>
@@ -28811,7 +28754,7 @@
         <p:spPr>
           <a:xfrm>
             <a:off x="822960" y="384048"/>
-            <a:ext cx="8229600" cy="411480"/>
+            <a:ext cx="10607040" cy="411480"/>
           </a:xfrm>
           <a:prstGeom prst="rect">
             <a:avLst/>
@@ -29897,7 +29840,7 @@
         <p:spPr>
           <a:xfrm>
             <a:off x="822960" y="384048"/>
-            <a:ext cx="8229600" cy="411480"/>
+            <a:ext cx="10607040" cy="411480"/>
           </a:xfrm>
           <a:prstGeom prst="rect">
             <a:avLst/>
@@ -30058,15 +30001,44 @@
           </a:p>
         </p:txBody>
       </p:sp>
-      <p:sp>
-        <p:nvSpPr>
-          <p:cNvPr id="8" name="TextBox 7"/>
+      <p:pic>
+        <p:nvPicPr>
+          <p:cNvPr id="8" name="Picture 7" descr="image.jpg"/>
+          <p:cNvPicPr>
+            <a:picLocks noChangeAspect="1"/>
+          </p:cNvPicPr>
+          <p:nvPr/>
+        </p:nvPicPr>
+        <p:blipFill>
+          <a:blip r:embed="rId3"/>
+          <a:stretch>
+            <a:fillRect/>
+          </a:stretch>
+        </p:blipFill>
+        <p:spPr>
+          <a:xfrm>
+            <a:off x="822960" y="1828800"/>
+            <a:ext cx="2423160" cy="2834640"/>
+          </a:xfrm>
+          <a:prstGeom prst="rect">
+            <a:avLst/>
+          </a:prstGeom>
+          <a:ln w="31750">
+            <a:solidFill>
+              <a:srgbClr val="C8A15A"/>
+            </a:solidFill>
+          </a:ln>
+        </p:spPr>
+      </p:pic>
+      <p:sp>
+        <p:nvSpPr>
+          <p:cNvPr id="9" name="TextBox 8"/>
           <p:cNvSpPr txBox="1"/>
           <p:nvPr/>
         </p:nvSpPr>
         <p:spPr>
           <a:xfrm>
-            <a:off x="822960" y="1783080"/>
+            <a:off x="3520440" y="1783080"/>
             <a:ext cx="914400" cy="914400"/>
           </a:xfrm>
           <a:prstGeom prst="rect">
@@ -30102,14 +30074,14 @@
       </p:sp>
       <p:sp>
         <p:nvSpPr>
-          <p:cNvPr id="9" name="TextBox 8"/>
+          <p:cNvPr id="10" name="TextBox 9"/>
           <p:cNvSpPr txBox="1"/>
           <p:nvPr/>
         </p:nvSpPr>
         <p:spPr>
           <a:xfrm>
-            <a:off x="1463040" y="1965960"/>
-            <a:ext cx="9692640" cy="2011680"/>
+            <a:off x="4114800" y="1920240"/>
+            <a:ext cx="7223760" cy="2103120"/>
           </a:xfrm>
           <a:prstGeom prst="rect">
             <a:avLst/>
@@ -30124,7 +30096,7 @@
           <a:p>
             <a:pPr algn="l">
               <a:lnSpc>
-                <a:spcPct val="130000"/>
+                <a:spcPct val="125000"/>
               </a:lnSpc>
             </a:pPr>
             <a:r>
@@ -30144,13 +30116,13 @@
       </p:sp>
       <p:sp>
         <p:nvSpPr>
-          <p:cNvPr id="10" name="TextBox 9"/>
+          <p:cNvPr id="11" name="TextBox 10"/>
           <p:cNvSpPr txBox="1"/>
           <p:nvPr/>
         </p:nvSpPr>
         <p:spPr>
           <a:xfrm>
-            <a:off x="4023360" y="4023360"/>
+            <a:off x="4023360" y="4069080"/>
             <a:ext cx="7315200" cy="502920"/>
           </a:xfrm>
           <a:prstGeom prst="rect">
@@ -30186,7 +30158,7 @@
       </p:sp>
       <p:sp>
         <p:nvSpPr>
-          <p:cNvPr id="11" name="Rectangle 10"/>
+          <p:cNvPr id="12" name="Rectangle 11"/>
           <p:cNvSpPr/>
           <p:nvPr/>
         </p:nvSpPr>
@@ -30230,7 +30202,7 @@
       </p:sp>
       <p:sp>
         <p:nvSpPr>
-          <p:cNvPr id="12" name="TextBox 11"/>
+          <p:cNvPr id="13" name="TextBox 12"/>
           <p:cNvSpPr txBox="1"/>
           <p:nvPr/>
         </p:nvSpPr>
